--- a/Topic_D/Exam_Practice/TD-L06_Speaking_Workshop_Jobs_and_Professions.pptx
+++ b/Topic_D/Exam_Practice/TD-L06_Speaking_Workshop_Jobs_and_Professions.pptx
@@ -615,7 +615,11 @@
           <a:lstStyle/>
           <a:p>
             <a:r>
-              <a:rPr lang="en-US" dirty="0"/>
+              <a:rPr lang="ar-SA" dirty="0">
+                <a:latin typeface="Amiri" pitchFamily="2" charset="-78"/>
+                <a:ea typeface="Amiri" pitchFamily="2" charset="-78"/>
+                <a:cs typeface="Amiri" pitchFamily="2" charset="-78"/>
+              </a:rPr>
               <a:t>ROLE PLAY C (Develop) — a school podcast.
 SET-UP IN THE BREAKOUT ROOM: A = examiner (reads the left column ONLY — the questions, in order), B = candidate (sees the task column; Core may use the help column), C = observer (ticks the feedback checklist). 1 minute preparation, about 3 minutes speaking, 1 minute feedback, then rotate.
 Task ! is the unexpected question: in the exam the candidate has not seen it — the examiner should read it without warning.
@@ -707,7 +711,11 @@
           <a:lstStyle/>
           <a:p>
             <a:r>
-              <a:rPr lang="en-US" dirty="0"/>
+              <a:rPr lang="ar-SA" dirty="0">
+                <a:latin typeface="Amiri" pitchFamily="2" charset="-78"/>
+                <a:ea typeface="Amiri" pitchFamily="2" charset="-78"/>
+                <a:cs typeface="Amiri" pitchFamily="2" charset="-78"/>
+              </a:rPr>
               <a:t>ROLE PLAY D (Stretch) — a careers debate.
 SET-UP IN THE BREAKOUT ROOM: A = examiner (reads the left column ONLY — the questions, in order), B = candidate (sees the task column; Core may use the help column), C = observer (ticks the feedback checklist). 1 minute preparation, about 3 minutes speaking, 1 minute feedback, then rotate.
 Task ! is the unexpected question: in the exam the candidate has not seen it — the examiner should read it without warning.
@@ -1243,7 +1251,11 @@
           <a:lstStyle/>
           <a:p>
             <a:r>
-              <a:rPr lang="en-US" dirty="0"/>
+              <a:rPr lang="ar-SA" dirty="0">
+                <a:latin typeface="Amiri" pitchFamily="2" charset="-78"/>
+                <a:ea typeface="Amiri" pitchFamily="2" charset="-78"/>
+                <a:cs typeface="Amiri" pitchFamily="2" charset="-78"/>
+              </a:rPr>
               <a:t>TOPIC CONVERSATION — Core. Examiner asks the questions in order and may add “لِمَاذَا؟ / هَلْ يُمْكِنُ أَنْ تَشْرَحَ أَكْثَرَ؟” to push for more. Candidate aims for one full sentence per question.
 </a:t>
             </a:r>
@@ -1332,7 +1344,11 @@
           <a:lstStyle/>
           <a:p>
             <a:r>
-              <a:rPr lang="en-US" dirty="0"/>
+              <a:rPr lang="ar-SA" dirty="0">
+                <a:latin typeface="Amiri" pitchFamily="2" charset="-78"/>
+                <a:ea typeface="Amiri" pitchFamily="2" charset="-78"/>
+                <a:cs typeface="Amiri" pitchFamily="2" charset="-78"/>
+              </a:rPr>
               <a:t>TOPIC CONVERSATION — Develop. Examiner asks the questions in order and may add “لِمَاذَا؟ / هَلْ يُمْكِنُ أَنْ تَشْرَحَ أَكْثَرَ؟” to push for more. Candidate aims for two or three sentences, with duties, a comparison and a past detail.
 </a:t>
             </a:r>
@@ -1421,7 +1437,11 @@
           <a:lstStyle/>
           <a:p>
             <a:r>
-              <a:rPr lang="en-US" dirty="0"/>
+              <a:rPr lang="ar-SA" dirty="0">
+                <a:latin typeface="Amiri" pitchFamily="2" charset="-78"/>
+                <a:ea typeface="Amiri" pitchFamily="2" charset="-78"/>
+                <a:cs typeface="Amiri" pitchFamily="2" charset="-78"/>
+              </a:rPr>
               <a:t>TOPIC CONVERSATION — Stretch. Examiner asks the questions in order and may add “لِمَاذَا؟ / هَلْ يُمْكِنُ أَنْ تَشْرَحَ أَكْثَرَ؟” to push for more. Candidate aims for a developed answer: opinion, balance, concession and a conditional.
 </a:t>
             </a:r>
@@ -1510,7 +1530,11 @@
           <a:lstStyle/>
           <a:p>
             <a:r>
-              <a:rPr lang="en-US" dirty="0"/>
+              <a:rPr lang="ar-SA" dirty="0">
+                <a:latin typeface="Amiri" pitchFamily="2" charset="-78"/>
+                <a:ea typeface="Amiri" pitchFamily="2" charset="-78"/>
+                <a:cs typeface="Amiri" pitchFamily="2" charset="-78"/>
+              </a:rPr>
               <a:t>WELCOME (1 min) — while students join.
 • Greet each student by name as they arrive: السَّلَامُ عَلَيْكُمْ. Take the register (Pastoral Tracker: attendance 0/1).
 • 2-MINUTE CHECK-IN (SEND training): a private chat to any student who seemed unsettled last lesson — “Are you okay today? 👍 / 👎”.
@@ -2224,7 +2248,11 @@
           <a:lstStyle/>
           <a:p>
             <a:r>
-              <a:rPr lang="en-US" dirty="0"/>
+              <a:rPr lang="ar-SA" dirty="0">
+                <a:latin typeface="Amiri" pitchFamily="2" charset="-78"/>
+                <a:ea typeface="Amiri" pitchFamily="2" charset="-78"/>
+                <a:cs typeface="Amiri" pitchFamily="2" charset="-78"/>
+              </a:rPr>
               <a:t>TEACH (3 min). Role play = precise and complete; conversation = develop. Choral repetition of the repair phrases. To a girl: تُعِيدِي.</a:t>
             </a:r>
             <a:endParaRPr lang="en-US" dirty="0"/>
@@ -2312,7 +2340,11 @@
           <a:lstStyle/>
           <a:p>
             <a:r>
-              <a:rPr lang="en-US" dirty="0"/>
+              <a:rPr lang="ar-SA" dirty="0">
+                <a:latin typeface="Amiri" pitchFamily="2" charset="-78"/>
+                <a:ea typeface="Amiri" pitchFamily="2" charset="-78"/>
+                <a:cs typeface="Amiri" pitchFamily="2" charset="-78"/>
+              </a:rPr>
               <a:t>LANGUAGE BANK (2 min) — most job nouns add ـة for the feminine: مُهَنْدِسٌ → مُهَنْدِسَةٌ. Sound plurals: مُهَنْدِسُونَ · مُهَنْدِسَاتٌ. Broken plurals: أَطِبَّاءُ · طُهَاةٌ. أَبِي مُهَنْدِسٌ · أُمِّي طَبِيبَةٌ.</a:t>
             </a:r>
             <a:endParaRPr lang="en-US" dirty="0"/>
@@ -2400,7 +2432,11 @@
           <a:lstStyle/>
           <a:p>
             <a:r>
-              <a:rPr lang="en-US" dirty="0"/>
+              <a:rPr lang="ar-SA" dirty="0">
+                <a:latin typeface="Amiri" pitchFamily="2" charset="-78"/>
+                <a:ea typeface="Amiri" pitchFamily="2" charset="-78"/>
+                <a:cs typeface="Amiri" pitchFamily="2" charset="-78"/>
+              </a:rPr>
               <a:t>LANGUAGE BANK (2 min) — the verb and adjective agree with the worker: تَعْمَلُ المُمَرِّضَةُ فِي المُسْتَشْفَى · عَمَلُهَا مُتْعِبٌ (عَمَل is m.) · الوَظِيفَةُ مُتْعِبَةٌ (f.). Pros and cons: مِنْ مَزَايَاهَا … وَمِنْ عُيُوبِهَا …</a:t>
             </a:r>
             <a:endParaRPr lang="en-US" dirty="0"/>
@@ -2576,7 +2612,11 @@
           <a:lstStyle/>
           <a:p>
             <a:r>
-              <a:rPr lang="en-US" dirty="0"/>
+              <a:rPr lang="ar-SA" dirty="0">
+                <a:latin typeface="Amiri" pitchFamily="2" charset="-78"/>
+                <a:ea typeface="Amiri" pitchFamily="2" charset="-78"/>
+                <a:cs typeface="Amiri" pitchFamily="2" charset="-78"/>
+              </a:rPr>
               <a:t>ROLE PLAY A (Core) — meeting a new friend.
 SET-UP IN THE BREAKOUT ROOM: A = examiner (reads the left column ONLY — the questions, in order), B = candidate (sees the task column; Core may use the help column), C = observer (ticks the feedback checklist). 1 minute preparation, about 3 minutes speaking, 1 minute feedback, then rotate.
 Task ! is the unexpected question: in the exam the candidate has not seen it — the examiner should read it without warning.
@@ -2668,7 +2708,11 @@
           <a:lstStyle/>
           <a:p>
             <a:r>
-              <a:rPr lang="en-US" dirty="0"/>
+              <a:rPr lang="ar-SA" dirty="0">
+                <a:latin typeface="Amiri" pitchFamily="2" charset="-78"/>
+                <a:ea typeface="Amiri" pitchFamily="2" charset="-78"/>
+                <a:cs typeface="Amiri" pitchFamily="2" charset="-78"/>
+              </a:rPr>
               <a:t>ROLE PLAY B (Core+) — a careers quiz.
 SET-UP IN THE BREAKOUT ROOM: A = examiner (reads the left column ONLY — the questions, in order), B = candidate (sees the task column; Core may use the help column), C = observer (ticks the feedback checklist). 1 minute preparation, about 3 minutes speaking, 1 minute feedback, then rotate.
 Task ! is the unexpected question: in the exam the candidate has not seen it — the examiner should read it without warning.
@@ -3156,6 +3200,7 @@
                   <a:srgbClr val="D4AF37"/>
                 </a:solidFill>
                 <a:latin typeface="Amiri" pitchFamily="2" charset="-78"/>
+                <a:ea typeface="Amiri" pitchFamily="2" charset="-78"/>
                 <a:cs typeface="Amiri" pitchFamily="2" charset="-78"/>
               </a:rPr>
               <a:t>م</a:t>
@@ -3362,6 +3407,7 @@
                   <a:srgbClr val="D4AF37"/>
                 </a:solidFill>
                 <a:latin typeface="Amiri" pitchFamily="2" charset="-78"/>
+                <a:ea typeface="Amiri" pitchFamily="2" charset="-78"/>
                 <a:cs typeface="Amiri" pitchFamily="2" charset="-78"/>
               </a:rPr>
               <a:t>وَرْشَةُ التَّحَدُّثِ — الوَظَائِفُ وَالمِهَنُ</a:t>
@@ -3413,6 +3459,7 @@
                   <a:srgbClr val="C6D2E6"/>
                 </a:solidFill>
                 <a:latin typeface="Amiri" pitchFamily="2" charset="-78"/>
+                <a:ea typeface="Amiri" pitchFamily="2" charset="-78"/>
                 <a:cs typeface="Amiri" pitchFamily="2" charset="-78"/>
               </a:rPr>
               <a:t>طَبِيبٌ</a:t>
@@ -3439,6 +3486,7 @@
                   <a:srgbClr val="C6D2E6"/>
                 </a:solidFill>
                 <a:latin typeface="Amiri" pitchFamily="2" charset="-78"/>
+                <a:ea typeface="Amiri" pitchFamily="2" charset="-78"/>
                 <a:cs typeface="Amiri" pitchFamily="2" charset="-78"/>
               </a:rPr>
               <a:t>طَبِيبَةٌ</a:t>
@@ -3465,6 +3513,7 @@
                   <a:srgbClr val="C6D2E6"/>
                 </a:solidFill>
                 <a:latin typeface="Amiri" pitchFamily="2" charset="-78"/>
+                <a:ea typeface="Amiri" pitchFamily="2" charset="-78"/>
                 <a:cs typeface="Amiri" pitchFamily="2" charset="-78"/>
               </a:rPr>
               <a:t>أَطِبَّاءُ</a:t>
@@ -3491,6 +3540,7 @@
                   <a:srgbClr val="C6D2E6"/>
                 </a:solidFill>
                 <a:latin typeface="Amiri" pitchFamily="2" charset="-78"/>
+                <a:ea typeface="Amiri" pitchFamily="2" charset="-78"/>
                 <a:cs typeface="Amiri" pitchFamily="2" charset="-78"/>
               </a:rPr>
               <a:t>يَعْمَلُ فِي</a:t>
@@ -3517,6 +3567,7 @@
                   <a:srgbClr val="C6D2E6"/>
                 </a:solidFill>
                 <a:latin typeface="Amiri" pitchFamily="2" charset="-78"/>
+                <a:ea typeface="Amiri" pitchFamily="2" charset="-78"/>
                 <a:cs typeface="Amiri" pitchFamily="2" charset="-78"/>
               </a:rPr>
               <a:t>تُسَاعِدُ</a:t>
@@ -3949,6 +4000,7 @@
                   <a:srgbClr val="D4AF37"/>
                 </a:solidFill>
                 <a:latin typeface="Amiri" pitchFamily="2" charset="-78"/>
+                <a:ea typeface="Amiri" pitchFamily="2" charset="-78"/>
                 <a:cs typeface="Amiri" pitchFamily="2" charset="-78"/>
               </a:rPr>
               <a:t>م</a:t>
@@ -4269,6 +4321,7 @@
                   <a:srgbClr val="8A6D1E"/>
                 </a:solidFill>
                 <a:latin typeface="Amiri" pitchFamily="2" charset="-78"/>
+                <a:ea typeface="Amiri" pitchFamily="2" charset="-78"/>
                 <a:cs typeface="Amiri" pitchFamily="2" charset="-78"/>
               </a:rPr>
               <a:t>مُقَابَلَةٌ عَنِ العَمَلِ</a:t>
@@ -4549,6 +4602,7 @@
                   <a:srgbClr val="1B3B6F"/>
                 </a:solidFill>
                 <a:latin typeface="Amiri" pitchFamily="2" charset="-78"/>
+                <a:ea typeface="Amiri" pitchFamily="2" charset="-78"/>
                 <a:cs typeface="Amiri" pitchFamily="2" charset="-78"/>
               </a:rPr>
               <a:t>مُنْذُ مَتَى …؟</a:t>
@@ -4625,6 +4679,7 @@
                   <a:srgbClr val="1B3B6F"/>
                 </a:solidFill>
                 <a:latin typeface="Amiri" pitchFamily="2" charset="-78"/>
+                <a:ea typeface="Amiri" pitchFamily="2" charset="-78"/>
                 <a:cs typeface="Amiri" pitchFamily="2" charset="-78"/>
               </a:rPr>
               <a:t>مَرْحَبًا! مَا أَسْئِلَتُكَ؟</a:t>
@@ -4728,6 +4783,7 @@
                   <a:srgbClr val="1B3B6F"/>
                 </a:solidFill>
                 <a:latin typeface="Amiri" pitchFamily="2" charset="-78"/>
+                <a:ea typeface="Amiri" pitchFamily="2" charset="-78"/>
                 <a:cs typeface="Amiri" pitchFamily="2" charset="-78"/>
               </a:rPr>
               <a:t>مِنْ مَزَايَاهُ … وَمِنْ عُيُوبِهِ …</a:t>
@@ -4804,6 +4860,7 @@
                   <a:srgbClr val="1B3B6F"/>
                 </a:solidFill>
                 <a:latin typeface="Amiri" pitchFamily="2" charset="-78"/>
+                <a:ea typeface="Amiri" pitchFamily="2" charset="-78"/>
                 <a:cs typeface="Amiri" pitchFamily="2" charset="-78"/>
               </a:rPr>
               <a:t>مُنْذُ عَشْرِ سَنَوَاتٍ. وَأَنْتَ، مَا رَأْيُكَ فِي التَّمْرِيضِ؟</a:t>
@@ -4907,6 +4964,7 @@
                   <a:srgbClr val="1B3B6F"/>
                 </a:solidFill>
                 <a:latin typeface="Amiri" pitchFamily="2" charset="-78"/>
+                <a:ea typeface="Amiri" pitchFamily="2" charset="-78"/>
                 <a:cs typeface="Amiri" pitchFamily="2" charset="-78"/>
               </a:rPr>
               <a:t>رَأَيْتُ … وَعَرَفْتُ أَنَّ …</a:t>
@@ -4983,6 +5041,7 @@
                   <a:srgbClr val="1B3B6F"/>
                 </a:solidFill>
                 <a:latin typeface="Amiri" pitchFamily="2" charset="-78"/>
+                <a:ea typeface="Amiri" pitchFamily="2" charset="-78"/>
                 <a:cs typeface="Amiri" pitchFamily="2" charset="-78"/>
               </a:rPr>
               <a:t>مَاذَا تَعَلَّمْتَ مِنْ زِيَارَتِكَ لِلْمُسْتَشْفَى؟</a:t>
@@ -5086,6 +5145,7 @@
                   <a:srgbClr val="1B3B6F"/>
                 </a:solidFill>
                 <a:latin typeface="Amiri" pitchFamily="2" charset="-78"/>
+                <a:ea typeface="Amiri" pitchFamily="2" charset="-78"/>
                 <a:cs typeface="Amiri" pitchFamily="2" charset="-78"/>
               </a:rPr>
               <a:t>أُفَضِّلُ … لِأَنَّهُ أَ… لٰكِنَّ …</a:t>
@@ -5162,6 +5222,7 @@
                   <a:srgbClr val="1B3B6F"/>
                 </a:solidFill>
                 <a:latin typeface="Amiri" pitchFamily="2" charset="-78"/>
+                <a:ea typeface="Amiri" pitchFamily="2" charset="-78"/>
                 <a:cs typeface="Amiri" pitchFamily="2" charset="-78"/>
               </a:rPr>
               <a:t>هَلْ تُفَضِّلُ العَمَلَ فِي مُسْتَشْفًى أَمْ فِي مَكْتَبٍ؟</a:t>
@@ -5265,6 +5326,7 @@
                   <a:srgbClr val="1B3B6F"/>
                 </a:solidFill>
                 <a:latin typeface="Amiri" pitchFamily="2" charset="-78"/>
+                <a:ea typeface="Amiri" pitchFamily="2" charset="-78"/>
                 <a:cs typeface="Amiri" pitchFamily="2" charset="-78"/>
               </a:rPr>
               <a:t>إِذَا حَصَلْتُ …، فَسَأَدْرُسُ …</a:t>
@@ -5341,6 +5403,7 @@
                   <a:srgbClr val="1B3B6F"/>
                 </a:solidFill>
                 <a:latin typeface="Amiri" pitchFamily="2" charset="-78"/>
+                <a:ea typeface="Amiri" pitchFamily="2" charset="-78"/>
                 <a:cs typeface="Amiri" pitchFamily="2" charset="-78"/>
               </a:rPr>
               <a:t>هَلْ سَتَعْمَلُ فِي المَجَالِ الطِّبِّيِّ؟</a:t>
@@ -5550,6 +5613,7 @@
                   <a:srgbClr val="D4AF37"/>
                 </a:solidFill>
                 <a:latin typeface="Amiri" pitchFamily="2" charset="-78"/>
+                <a:ea typeface="Amiri" pitchFamily="2" charset="-78"/>
                 <a:cs typeface="Amiri" pitchFamily="2" charset="-78"/>
               </a:rPr>
               <a:t>م</a:t>
@@ -5870,6 +5934,7 @@
                   <a:srgbClr val="8A6D1E"/>
                 </a:solidFill>
                 <a:latin typeface="Amiri" pitchFamily="2" charset="-78"/>
+                <a:ea typeface="Amiri" pitchFamily="2" charset="-78"/>
                 <a:cs typeface="Amiri" pitchFamily="2" charset="-78"/>
               </a:rPr>
               <a:t>الرَّاتِبُ أَمِ الشَّغَفُ؟</a:t>
@@ -6150,6 +6215,7 @@
                   <a:srgbClr val="1B3B6F"/>
                 </a:solidFill>
                 <a:latin typeface="Amiri" pitchFamily="2" charset="-78"/>
+                <a:ea typeface="Amiri" pitchFamily="2" charset="-78"/>
                 <a:cs typeface="Amiri" pitchFamily="2" charset="-78"/>
               </a:rPr>
               <a:t>مِنْ نَاحِيَةٍ … وَمِنْ نَاحِيَةٍ أُخْرَى …</a:t>
@@ -6226,6 +6292,7 @@
                   <a:srgbClr val="1B3B6F"/>
                 </a:solidFill>
                 <a:latin typeface="Amiri" pitchFamily="2" charset="-78"/>
+                <a:ea typeface="Amiri" pitchFamily="2" charset="-78"/>
                 <a:cs typeface="Amiri" pitchFamily="2" charset="-78"/>
               </a:rPr>
               <a:t>هَلْ يَجِبُ أَنْ نَخْتَارَ المِهْنَةَ بِحَسَبِ الرَّاتِبِ؟</a:t>
@@ -6329,6 +6396,7 @@
                   <a:srgbClr val="1B3B6F"/>
                 </a:solidFill>
                 <a:latin typeface="Amiri" pitchFamily="2" charset="-78"/>
+                <a:ea typeface="Amiri" pitchFamily="2" charset="-78"/>
                 <a:cs typeface="Amiri" pitchFamily="2" charset="-78"/>
               </a:rPr>
               <a:t>صَحِيحٌ أَنَّ … غَيْرَ أَنَّ …</a:t>
@@ -6405,6 +6473,7 @@
                   <a:srgbClr val="1B3B6F"/>
                 </a:solidFill>
                 <a:latin typeface="Amiri" pitchFamily="2" charset="-78"/>
+                <a:ea typeface="Amiri" pitchFamily="2" charset="-78"/>
                 <a:cs typeface="Amiri" pitchFamily="2" charset="-78"/>
               </a:rPr>
               <a:t>لٰكِنَّ المُعَلِّمِينَ وَالمُمَرِّضِينَ رَوَاتِبُهُمْ مُنْخَفِضَةٌ!</a:t>
@@ -6508,6 +6577,7 @@
                   <a:srgbClr val="1B3B6F"/>
                 </a:solidFill>
                 <a:latin typeface="Amiri" pitchFamily="2" charset="-78"/>
+                <a:ea typeface="Amiri" pitchFamily="2" charset="-78"/>
                 <a:cs typeface="Amiri" pitchFamily="2" charset="-78"/>
               </a:rPr>
               <a:t>نَعَمْ، كَانَ … ثُمَّ …</a:t>
@@ -6584,6 +6654,7 @@
                   <a:srgbClr val="1B3B6F"/>
                 </a:solidFill>
                 <a:latin typeface="Amiri" pitchFamily="2" charset="-78"/>
+                <a:ea typeface="Amiri" pitchFamily="2" charset="-78"/>
                 <a:cs typeface="Amiri" pitchFamily="2" charset="-78"/>
               </a:rPr>
               <a:t>هَلْ تَعْرِفُ شَخْصًا غَيَّرَ مِهْنَتَهُ؟</a:t>
@@ -6687,6 +6758,7 @@
                   <a:srgbClr val="1B3B6F"/>
                 </a:solidFill>
                 <a:latin typeface="Amiri" pitchFamily="2" charset="-78"/>
+                <a:ea typeface="Amiri" pitchFamily="2" charset="-78"/>
                 <a:cs typeface="Amiri" pitchFamily="2" charset="-78"/>
               </a:rPr>
               <a:t>مِنَ المُتَوَقَّعِ أَنْ … بِسَبَبِ …</a:t>
@@ -6763,6 +6835,7 @@
                   <a:srgbClr val="1B3B6F"/>
                 </a:solidFill>
                 <a:latin typeface="Amiri" pitchFamily="2" charset="-78"/>
+                <a:ea typeface="Amiri" pitchFamily="2" charset="-78"/>
                 <a:cs typeface="Amiri" pitchFamily="2" charset="-78"/>
               </a:rPr>
               <a:t>وَمَا المِهَنُ الَّتِي سَتَخْتَفِي فِي المُسْتَقْبَلِ؟</a:t>
@@ -6866,6 +6939,7 @@
                   <a:srgbClr val="1B3B6F"/>
                 </a:solidFill>
                 <a:latin typeface="Amiri" pitchFamily="2" charset="-78"/>
+                <a:ea typeface="Amiri" pitchFamily="2" charset="-78"/>
                 <a:cs typeface="Amiri" pitchFamily="2" charset="-78"/>
               </a:rPr>
               <a:t>لَوْ عَمِلْتُ …، لَاخْتَرْتُ …</a:t>
@@ -6942,6 +7016,7 @@
                   <a:srgbClr val="1B3B6F"/>
                 </a:solidFill>
                 <a:latin typeface="Amiri" pitchFamily="2" charset="-78"/>
+                <a:ea typeface="Amiri" pitchFamily="2" charset="-78"/>
                 <a:cs typeface="Amiri" pitchFamily="2" charset="-78"/>
               </a:rPr>
               <a:t>لَوْ عَمِلْتَ يَوْمًا وَاحِدًا فِي أَيِّ مِهْنَةٍ، مَاذَا تَخْتَارُ؟</a:t>
@@ -7151,6 +7226,7 @@
                   <a:srgbClr val="D4AF37"/>
                 </a:solidFill>
                 <a:latin typeface="Amiri" pitchFamily="2" charset="-78"/>
+                <a:ea typeface="Amiri" pitchFamily="2" charset="-78"/>
                 <a:cs typeface="Amiri" pitchFamily="2" charset="-78"/>
               </a:rPr>
               <a:t>م</a:t>
@@ -7471,6 +7547,7 @@
                   <a:srgbClr val="8A6D1E"/>
                 </a:solidFill>
                 <a:latin typeface="Amiri" pitchFamily="2" charset="-78"/>
+                <a:ea typeface="Amiri" pitchFamily="2" charset="-78"/>
                 <a:cs typeface="Amiri" pitchFamily="2" charset="-78"/>
               </a:rPr>
               <a:t>وَرَقَةُ المُلَاحِظِ</a:t>
@@ -8941,6 +9018,7 @@
                   <a:srgbClr val="D4AF37"/>
                 </a:solidFill>
                 <a:latin typeface="Amiri" pitchFamily="2" charset="-78"/>
+                <a:ea typeface="Amiri" pitchFamily="2" charset="-78"/>
                 <a:cs typeface="Amiri" pitchFamily="2" charset="-78"/>
               </a:rPr>
               <a:t>م</a:t>
@@ -9261,6 +9339,7 @@
                   <a:srgbClr val="8A6D1E"/>
                 </a:solidFill>
                 <a:latin typeface="Amiri" pitchFamily="2" charset="-78"/>
+                <a:ea typeface="Amiri" pitchFamily="2" charset="-78"/>
                 <a:cs typeface="Amiri" pitchFamily="2" charset="-78"/>
               </a:rPr>
               <a:t>نَمُوذَجُ الإِجَابَةِ</a:t>
@@ -9503,6 +9582,7 @@
                   <a:srgbClr val="1B3B6F"/>
                 </a:solidFill>
                 <a:latin typeface="Amiri" pitchFamily="2" charset="-78"/>
+                <a:ea typeface="Amiri" pitchFamily="2" charset="-78"/>
                 <a:cs typeface="Amiri" pitchFamily="2" charset="-78"/>
               </a:rPr>
               <a:t>أَبِي مُهَنْدِسٌ.</a:t>
@@ -9579,6 +9659,7 @@
                   <a:srgbClr val="1B3B6F"/>
                 </a:solidFill>
                 <a:latin typeface="Amiri" pitchFamily="2" charset="-78"/>
+                <a:ea typeface="Amiri" pitchFamily="2" charset="-78"/>
                 <a:cs typeface="Amiri" pitchFamily="2" charset="-78"/>
               </a:rPr>
               <a:t>مَاذَا يَعْمَلُ أَبُوكَ؟</a:t>
@@ -9682,6 +9763,7 @@
                   <a:srgbClr val="1B3B6F"/>
                 </a:solidFill>
                 <a:latin typeface="Amiri" pitchFamily="2" charset="-78"/>
+                <a:ea typeface="Amiri" pitchFamily="2" charset="-78"/>
                 <a:cs typeface="Amiri" pitchFamily="2" charset="-78"/>
               </a:rPr>
               <a:t>يَعْمَلُ فِي شَرِكَةٍ كَبِيرَةٍ فِي لَنْدَنَ.</a:t>
@@ -9758,6 +9840,7 @@
                   <a:srgbClr val="1B3B6F"/>
                 </a:solidFill>
                 <a:latin typeface="Amiri" pitchFamily="2" charset="-78"/>
+                <a:ea typeface="Amiri" pitchFamily="2" charset="-78"/>
                 <a:cs typeface="Amiri" pitchFamily="2" charset="-78"/>
               </a:rPr>
               <a:t>أَيْنَ يَعْمَلُ؟</a:t>
@@ -9861,6 +9944,7 @@
                   <a:srgbClr val="1B3B6F"/>
                 </a:solidFill>
                 <a:latin typeface="Amiri" pitchFamily="2" charset="-78"/>
+                <a:ea typeface="Amiri" pitchFamily="2" charset="-78"/>
                 <a:cs typeface="Amiri" pitchFamily="2" charset="-78"/>
               </a:rPr>
               <a:t>أُمِّي طَبِيبَةٌ، وَتَعْمَلُ فِي مُسْتَشْفًى.</a:t>
@@ -9937,6 +10021,7 @@
                   <a:srgbClr val="1B3B6F"/>
                 </a:solidFill>
                 <a:latin typeface="Amiri" pitchFamily="2" charset="-78"/>
+                <a:ea typeface="Amiri" pitchFamily="2" charset="-78"/>
                 <a:cs typeface="Amiri" pitchFamily="2" charset="-78"/>
               </a:rPr>
               <a:t>وَأُمُّكَ؟</a:t>
@@ -10040,6 +10125,7 @@
                   <a:srgbClr val="1B3B6F"/>
                 </a:solidFill>
                 <a:latin typeface="Amiri" pitchFamily="2" charset="-78"/>
+                <a:ea typeface="Amiri" pitchFamily="2" charset="-78"/>
                 <a:cs typeface="Amiri" pitchFamily="2" charset="-78"/>
               </a:rPr>
               <a:t>مَاذَا تُدَرِّسُ؟</a:t>
@@ -10116,6 +10202,7 @@
                   <a:srgbClr val="1B3B6F"/>
                 </a:solidFill>
                 <a:latin typeface="Amiri" pitchFamily="2" charset="-78"/>
+                <a:ea typeface="Amiri" pitchFamily="2" charset="-78"/>
                 <a:cs typeface="Amiri" pitchFamily="2" charset="-78"/>
               </a:rPr>
               <a:t>أُمِّي مُعَلِّمَةٌ.</a:t>
@@ -10219,6 +10306,7 @@
                   <a:srgbClr val="1B3B6F"/>
                 </a:solidFill>
                 <a:latin typeface="Amiri" pitchFamily="2" charset="-78"/>
+                <a:ea typeface="Amiri" pitchFamily="2" charset="-78"/>
                 <a:cs typeface="Amiri" pitchFamily="2" charset="-78"/>
               </a:rPr>
               <a:t>أُرِيدُ أَنْ أَكُونَ مُبَرْمِجًا.</a:t>
@@ -10295,6 +10383,7 @@
                   <a:srgbClr val="1B3B6F"/>
                 </a:solidFill>
                 <a:latin typeface="Amiri" pitchFamily="2" charset="-78"/>
+                <a:ea typeface="Amiri" pitchFamily="2" charset="-78"/>
                 <a:cs typeface="Amiri" pitchFamily="2" charset="-78"/>
               </a:rPr>
               <a:t>مَاذَا تُرِيدُ أَنْ تَعْمَلَ فِي المُسْتَقْبَلِ؟</a:t>
@@ -10504,6 +10593,7 @@
                   <a:srgbClr val="D4AF37"/>
                 </a:solidFill>
                 <a:latin typeface="Amiri" pitchFamily="2" charset="-78"/>
+                <a:ea typeface="Amiri" pitchFamily="2" charset="-78"/>
                 <a:cs typeface="Amiri" pitchFamily="2" charset="-78"/>
               </a:rPr>
               <a:t>م</a:t>
@@ -10824,6 +10914,7 @@
                   <a:srgbClr val="8A6D1E"/>
                 </a:solidFill>
                 <a:latin typeface="Amiri" pitchFamily="2" charset="-78"/>
+                <a:ea typeface="Amiri" pitchFamily="2" charset="-78"/>
                 <a:cs typeface="Amiri" pitchFamily="2" charset="-78"/>
               </a:rPr>
               <a:t>نَمُوذَجُ الإِجَابَةِ</a:t>
@@ -11066,6 +11157,7 @@
                   <a:srgbClr val="1B3B6F"/>
                 </a:solidFill>
                 <a:latin typeface="Amiri" pitchFamily="2" charset="-78"/>
+                <a:ea typeface="Amiri" pitchFamily="2" charset="-78"/>
                 <a:cs typeface="Amiri" pitchFamily="2" charset="-78"/>
               </a:rPr>
               <a:t>يَعْمَلُ فِي مَطْعَمٍ.</a:t>
@@ -11142,6 +11234,7 @@
                   <a:srgbClr val="1B3B6F"/>
                 </a:solidFill>
                 <a:latin typeface="Amiri" pitchFamily="2" charset="-78"/>
+                <a:ea typeface="Amiri" pitchFamily="2" charset="-78"/>
                 <a:cs typeface="Amiri" pitchFamily="2" charset="-78"/>
               </a:rPr>
               <a:t>أَيْنَ يَعْمَلُ هٰذَا الشَّخْصُ؟</a:t>
@@ -11245,6 +11338,7 @@
                   <a:srgbClr val="1B3B6F"/>
                 </a:solidFill>
                 <a:latin typeface="Amiri" pitchFamily="2" charset="-78"/>
+                <a:ea typeface="Amiri" pitchFamily="2" charset="-78"/>
                 <a:cs typeface="Amiri" pitchFamily="2" charset="-78"/>
               </a:rPr>
               <a:t>يُحَضِّرُ الطَّعَامَ لِلزَّبَائِنِ.</a:t>
@@ -11321,6 +11415,7 @@
                   <a:srgbClr val="1B3B6F"/>
                 </a:solidFill>
                 <a:latin typeface="Amiri" pitchFamily="2" charset="-78"/>
+                <a:ea typeface="Amiri" pitchFamily="2" charset="-78"/>
                 <a:cs typeface="Amiri" pitchFamily="2" charset="-78"/>
               </a:rPr>
               <a:t>وَمَاذَا يَفْعَلُ؟</a:t>
@@ -11424,6 +11519,7 @@
                   <a:srgbClr val="1B3B6F"/>
                 </a:solidFill>
                 <a:latin typeface="Amiri" pitchFamily="2" charset="-78"/>
+                <a:ea typeface="Amiri" pitchFamily="2" charset="-78"/>
                 <a:cs typeface="Amiri" pitchFamily="2" charset="-78"/>
               </a:rPr>
               <a:t>نَعَمْ! وَالآنَ: هِيَ تَعْمَلُ فِي مَحْكَمَةٍ، وَتُدَافِعُ عَنِ النَّاسِ.</a:t>
@@ -11500,6 +11596,7 @@
                   <a:srgbClr val="1B3B6F"/>
                 </a:solidFill>
                 <a:latin typeface="Amiri" pitchFamily="2" charset="-78"/>
+                <a:ea typeface="Amiri" pitchFamily="2" charset="-78"/>
                 <a:cs typeface="Amiri" pitchFamily="2" charset="-78"/>
               </a:rPr>
               <a:t>هَلْ هُوَ طَبَّاخٌ؟</a:t>
@@ -11603,6 +11700,7 @@
                   <a:srgbClr val="1B3B6F"/>
                 </a:solidFill>
                 <a:latin typeface="Amiri" pitchFamily="2" charset="-78"/>
+                <a:ea typeface="Amiri" pitchFamily="2" charset="-78"/>
                 <a:cs typeface="Amiri" pitchFamily="2" charset="-78"/>
               </a:rPr>
               <a:t>صَحِيحٌ! دَوْرُكَ الآنَ: أَيْنَ يَعْمَلُ شَخْصُكَ؟</a:t>
@@ -11679,6 +11777,7 @@
                   <a:srgbClr val="1B3B6F"/>
                 </a:solidFill>
                 <a:latin typeface="Amiri" pitchFamily="2" charset="-78"/>
+                <a:ea typeface="Amiri" pitchFamily="2" charset="-78"/>
                 <a:cs typeface="Amiri" pitchFamily="2" charset="-78"/>
               </a:rPr>
               <a:t>مُحَامِيَةٌ؟</a:t>
@@ -11782,6 +11881,7 @@
                   <a:srgbClr val="1B3B6F"/>
                 </a:solidFill>
                 <a:latin typeface="Amiri" pitchFamily="2" charset="-78"/>
+                <a:ea typeface="Amiri" pitchFamily="2" charset="-78"/>
                 <a:cs typeface="Amiri" pitchFamily="2" charset="-78"/>
               </a:rPr>
               <a:t>أَصْعَبُ مِهْنَةٍ هِيَ التَّمْرِيضُ، لِأَنَّ سَاعَاتِ العَمَلِ طَوِيلَةٌ.</a:t>
@@ -11858,6 +11958,7 @@
                   <a:srgbClr val="1B3B6F"/>
                 </a:solidFill>
                 <a:latin typeface="Amiri" pitchFamily="2" charset="-78"/>
+                <a:ea typeface="Amiri" pitchFamily="2" charset="-78"/>
                 <a:cs typeface="Amiri" pitchFamily="2" charset="-78"/>
               </a:rPr>
               <a:t>أَيُّ مِهْنَةٍ أَصْعَبُ فِي رَأْيِكَ؟</a:t>
@@ -12067,6 +12168,7 @@
                   <a:srgbClr val="D4AF37"/>
                 </a:solidFill>
                 <a:latin typeface="Amiri" pitchFamily="2" charset="-78"/>
+                <a:ea typeface="Amiri" pitchFamily="2" charset="-78"/>
                 <a:cs typeface="Amiri" pitchFamily="2" charset="-78"/>
               </a:rPr>
               <a:t>م</a:t>
@@ -12387,6 +12489,7 @@
                   <a:srgbClr val="8A6D1E"/>
                 </a:solidFill>
                 <a:latin typeface="Amiri" pitchFamily="2" charset="-78"/>
+                <a:ea typeface="Amiri" pitchFamily="2" charset="-78"/>
                 <a:cs typeface="Amiri" pitchFamily="2" charset="-78"/>
               </a:rPr>
               <a:t>نَمُوذَجُ الإِجَابَةِ</a:t>
@@ -12629,6 +12732,7 @@
                   <a:srgbClr val="1B3B6F"/>
                 </a:solidFill>
                 <a:latin typeface="Amiri" pitchFamily="2" charset="-78"/>
+                <a:ea typeface="Amiri" pitchFamily="2" charset="-78"/>
                 <a:cs typeface="Amiri" pitchFamily="2" charset="-78"/>
               </a:rPr>
               <a:t>مُنْذُ مَتَى تَعْمَلِينَ مُمَرِّضَةً؟</a:t>
@@ -12705,6 +12809,7 @@
                   <a:srgbClr val="1B3B6F"/>
                 </a:solidFill>
                 <a:latin typeface="Amiri" pitchFamily="2" charset="-78"/>
+                <a:ea typeface="Amiri" pitchFamily="2" charset="-78"/>
                 <a:cs typeface="Amiri" pitchFamily="2" charset="-78"/>
               </a:rPr>
               <a:t>مَرْحَبًا! مَا أَسْئِلَتُكَ؟</a:t>
@@ -12808,6 +12913,7 @@
                   <a:srgbClr val="1B3B6F"/>
                 </a:solidFill>
                 <a:latin typeface="Amiri" pitchFamily="2" charset="-78"/>
+                <a:ea typeface="Amiri" pitchFamily="2" charset="-78"/>
                 <a:cs typeface="Amiri" pitchFamily="2" charset="-78"/>
               </a:rPr>
               <a:t>مِنْ مَزَايَاهُ أَنَّهُ يُسَاعِدُ النَّاسَ، وَمِنْ عُيُوبِهِ أَنَّ العَمَلَ فِي اللَّيْلِ مُتْعِبٌ.</a:t>
@@ -12884,6 +12990,7 @@
                   <a:srgbClr val="1B3B6F"/>
                 </a:solidFill>
                 <a:latin typeface="Amiri" pitchFamily="2" charset="-78"/>
+                <a:ea typeface="Amiri" pitchFamily="2" charset="-78"/>
                 <a:cs typeface="Amiri" pitchFamily="2" charset="-78"/>
               </a:rPr>
               <a:t>مُنْذُ عَشْرِ سَنَوَاتٍ. وَأَنْتَ، مَا رَأْيُكَ فِي التَّمْرِيضِ؟</a:t>
@@ -12987,6 +13094,7 @@
                   <a:srgbClr val="1B3B6F"/>
                 </a:solidFill>
                 <a:latin typeface="Amiri" pitchFamily="2" charset="-78"/>
+                <a:ea typeface="Amiri" pitchFamily="2" charset="-78"/>
                 <a:cs typeface="Amiri" pitchFamily="2" charset="-78"/>
               </a:rPr>
               <a:t>رَأَيْتُ أَطِبَّاءَ وَمُمَرِّضَاتٍ يَعْمَلُونَ بِسُرْعَةٍ وَهُدُوءٍ، وَعَرَفْتُ أَنَّ العَمَلَ الجَمَاعِيَّ ضَرُورِيٌّ.</a:t>
@@ -13063,6 +13171,7 @@
                   <a:srgbClr val="1B3B6F"/>
                 </a:solidFill>
                 <a:latin typeface="Amiri" pitchFamily="2" charset="-78"/>
+                <a:ea typeface="Amiri" pitchFamily="2" charset="-78"/>
                 <a:cs typeface="Amiri" pitchFamily="2" charset="-78"/>
               </a:rPr>
               <a:t>مَاذَا تَعَلَّمْتَ مِنْ زِيَارَتِكَ لِلْمُسْتَشْفَى؟</a:t>
@@ -13166,6 +13275,7 @@
                   <a:srgbClr val="1B3B6F"/>
                 </a:solidFill>
                 <a:latin typeface="Amiri" pitchFamily="2" charset="-78"/>
+                <a:ea typeface="Amiri" pitchFamily="2" charset="-78"/>
                 <a:cs typeface="Amiri" pitchFamily="2" charset="-78"/>
               </a:rPr>
               <a:t>أُفَضِّلُ المُسْتَشْفَى، لِأَنَّهُ أَكْثَرُ حَرَكَةً، لٰكِنَّ المَكْتَبَ أَهْدَأُ وَأَكْثَرُ رَاحَةً.</a:t>
@@ -13242,6 +13352,7 @@
                   <a:srgbClr val="1B3B6F"/>
                 </a:solidFill>
                 <a:latin typeface="Amiri" pitchFamily="2" charset="-78"/>
+                <a:ea typeface="Amiri" pitchFamily="2" charset="-78"/>
                 <a:cs typeface="Amiri" pitchFamily="2" charset="-78"/>
               </a:rPr>
               <a:t>هَلْ تُفَضِّلُ العَمَلَ فِي مُسْتَشْفًى أَمْ فِي مَكْتَبٍ؟</a:t>
@@ -13345,6 +13456,7 @@
                   <a:srgbClr val="1B3B6F"/>
                 </a:solidFill>
                 <a:latin typeface="Amiri" pitchFamily="2" charset="-78"/>
+                <a:ea typeface="Amiri" pitchFamily="2" charset="-78"/>
                 <a:cs typeface="Amiri" pitchFamily="2" charset="-78"/>
               </a:rPr>
               <a:t>إِذَا حَصَلْتُ عَلَى دَرَجَاتٍ جَيِّدَةٍ، فَسَأَدْرُسُ الطِّبَّ، وَسَأُصْبِحُ طَبِيبَ أَطْفَالٍ.</a:t>
@@ -13421,6 +13533,7 @@
                   <a:srgbClr val="1B3B6F"/>
                 </a:solidFill>
                 <a:latin typeface="Amiri" pitchFamily="2" charset="-78"/>
+                <a:ea typeface="Amiri" pitchFamily="2" charset="-78"/>
                 <a:cs typeface="Amiri" pitchFamily="2" charset="-78"/>
               </a:rPr>
               <a:t>هَلْ سَتَعْمَلُ فِي المَجَالِ الطِّبِّيِّ؟</a:t>
@@ -13630,6 +13743,7 @@
                   <a:srgbClr val="D4AF37"/>
                 </a:solidFill>
                 <a:latin typeface="Amiri" pitchFamily="2" charset="-78"/>
+                <a:ea typeface="Amiri" pitchFamily="2" charset="-78"/>
                 <a:cs typeface="Amiri" pitchFamily="2" charset="-78"/>
               </a:rPr>
               <a:t>م</a:t>
@@ -13950,6 +14064,7 @@
                   <a:srgbClr val="8A6D1E"/>
                 </a:solidFill>
                 <a:latin typeface="Amiri" pitchFamily="2" charset="-78"/>
+                <a:ea typeface="Amiri" pitchFamily="2" charset="-78"/>
                 <a:cs typeface="Amiri" pitchFamily="2" charset="-78"/>
               </a:rPr>
               <a:t>نَمُوذَجُ الإِجَابَةِ</a:t>
@@ -14192,6 +14307,7 @@
                   <a:srgbClr val="1B3B6F"/>
                 </a:solidFill>
                 <a:latin typeface="Amiri" pitchFamily="2" charset="-78"/>
+                <a:ea typeface="Amiri" pitchFamily="2" charset="-78"/>
                 <a:cs typeface="Amiri" pitchFamily="2" charset="-78"/>
               </a:rPr>
               <a:t>مِنْ نَاحِيَةٍ، يَحْتَاجُ الإِنْسَانُ إِلَى رَاتِبٍ يَكْفِيهِ، وَمِنْ نَاحِيَةٍ أُخْرَى، مَنْ يَعْمَلُ فِي مِهْنَةٍ يَكْرَهُهَا يَتْعَبُ مَهْمَا كَانَ رَاتِبُهُ مُرْتَفِعًا.</a:t>
@@ -14268,6 +14384,7 @@
                   <a:srgbClr val="1B3B6F"/>
                 </a:solidFill>
                 <a:latin typeface="Amiri" pitchFamily="2" charset="-78"/>
+                <a:ea typeface="Amiri" pitchFamily="2" charset="-78"/>
                 <a:cs typeface="Amiri" pitchFamily="2" charset="-78"/>
               </a:rPr>
               <a:t>هَلْ يَجِبُ أَنْ نَخْتَارَ المِهْنَةَ بِحَسَبِ الرَّاتِبِ؟</a:t>
@@ -14371,6 +14488,7 @@
                   <a:srgbClr val="1B3B6F"/>
                 </a:solidFill>
                 <a:latin typeface="Amiri" pitchFamily="2" charset="-78"/>
+                <a:ea typeface="Amiri" pitchFamily="2" charset="-78"/>
                 <a:cs typeface="Amiri" pitchFamily="2" charset="-78"/>
               </a:rPr>
               <a:t>صَحِيحٌ أَنَّ رَوَاتِبَهُمْ أَقَلُّ مِمَّا يَسْتَحِقُّونَ، غَيْرَ أَنَّ هٰذِهِ مَسْؤُولِيَّةُ الحُكُومَاتِ، لَا سَبَبٌ لِتَرْكِ هٰذِهِ المِهَنِ.</a:t>
@@ -14447,6 +14565,7 @@
                   <a:srgbClr val="1B3B6F"/>
                 </a:solidFill>
                 <a:latin typeface="Amiri" pitchFamily="2" charset="-78"/>
+                <a:ea typeface="Amiri" pitchFamily="2" charset="-78"/>
                 <a:cs typeface="Amiri" pitchFamily="2" charset="-78"/>
               </a:rPr>
               <a:t>لٰكِنَّ المُعَلِّمِينَ وَالمُمَرِّضِينَ رَوَاتِبُهُمْ مُنْخَفِضَةٌ!</a:t>
@@ -14550,6 +14669,7 @@
                   <a:srgbClr val="1B3B6F"/>
                 </a:solidFill>
                 <a:latin typeface="Amiri" pitchFamily="2" charset="-78"/>
+                <a:ea typeface="Amiri" pitchFamily="2" charset="-78"/>
                 <a:cs typeface="Amiri" pitchFamily="2" charset="-78"/>
               </a:rPr>
               <a:t>نَعَمْ، كَانَ خَالِي مُحَاسِبًا فِي بَنْكٍ، ثُمَّ تَرَكَ عَمَلَهُ وَأَصْبَحَ طَاهِيًا، فَقَلَّ رَاتِبُهُ، لٰكِنَّهُ صَارَ أَسْعَدَ بِكَثِيرٍ.</a:t>
@@ -14626,6 +14746,7 @@
                   <a:srgbClr val="1B3B6F"/>
                 </a:solidFill>
                 <a:latin typeface="Amiri" pitchFamily="2" charset="-78"/>
+                <a:ea typeface="Amiri" pitchFamily="2" charset="-78"/>
                 <a:cs typeface="Amiri" pitchFamily="2" charset="-78"/>
               </a:rPr>
               <a:t>هَلْ تَعْرِفُ شَخْصًا غَيَّرَ مِهْنَتَهُ؟</a:t>
@@ -14732,6 +14853,7 @@
                   <a:srgbClr val="1B3B6F"/>
                 </a:solidFill>
                 <a:latin typeface="Amiri" pitchFamily="2" charset="-78"/>
+                <a:ea typeface="Amiri" pitchFamily="2" charset="-78"/>
                 <a:cs typeface="Amiri" pitchFamily="2" charset="-78"/>
               </a:rPr>
               <a:t>مِنَ المُتَوَقَّعِ أَنْ تَخْتَفِيَ بَعْضُ وَظَائِفِ المَكَاتِبِ وَالمَصَانِعِ بِسَبَبِ الذَّكَاءِ الاصْطِنَاعِيِّ، بَيْنَمَا سَتَزْدَادُ الحَاجَةُ إِلَى المُمَرِّضِينَ وَالمُبَرْمِجِينَ.</a:t>
@@ -14808,6 +14930,7 @@
                   <a:srgbClr val="1B3B6F"/>
                 </a:solidFill>
                 <a:latin typeface="Amiri" pitchFamily="2" charset="-78"/>
+                <a:ea typeface="Amiri" pitchFamily="2" charset="-78"/>
                 <a:cs typeface="Amiri" pitchFamily="2" charset="-78"/>
               </a:rPr>
               <a:t>وَمَا المِهَنُ الَّتِي سَتَخْتَفِي فِي المُسْتَقْبَلِ؟</a:t>
@@ -14911,6 +15034,7 @@
                   <a:srgbClr val="1B3B6F"/>
                 </a:solidFill>
                 <a:latin typeface="Amiri" pitchFamily="2" charset="-78"/>
+                <a:ea typeface="Amiri" pitchFamily="2" charset="-78"/>
                 <a:cs typeface="Amiri" pitchFamily="2" charset="-78"/>
               </a:rPr>
               <a:t>لَوْ عَمِلْتُ يَوْمًا وَاحِدًا، لَاخْتَرْتُ أَنْ أَكُونَ رَائِدَ فَضَاءٍ، لِأَرَى الأَرْضَ مِنْ بَعِيدٍ.</a:t>
@@ -14987,6 +15111,7 @@
                   <a:srgbClr val="1B3B6F"/>
                 </a:solidFill>
                 <a:latin typeface="Amiri" pitchFamily="2" charset="-78"/>
+                <a:ea typeface="Amiri" pitchFamily="2" charset="-78"/>
                 <a:cs typeface="Amiri" pitchFamily="2" charset="-78"/>
               </a:rPr>
               <a:t>لَوْ عَمِلْتَ يَوْمًا وَاحِدًا فِي أَيِّ مِهْنَةٍ، مَاذَا تَخْتَارُ؟</a:t>
@@ -15196,6 +15321,7 @@
                   <a:srgbClr val="D4AF37"/>
                 </a:solidFill>
                 <a:latin typeface="Amiri" pitchFamily="2" charset="-78"/>
+                <a:ea typeface="Amiri" pitchFamily="2" charset="-78"/>
                 <a:cs typeface="Amiri" pitchFamily="2" charset="-78"/>
               </a:rPr>
               <a:t>م</a:t>
@@ -15516,6 +15642,7 @@
                   <a:srgbClr val="8A6D1E"/>
                 </a:solidFill>
                 <a:latin typeface="Amiri" pitchFamily="2" charset="-78"/>
+                <a:ea typeface="Amiri" pitchFamily="2" charset="-78"/>
                 <a:cs typeface="Amiri" pitchFamily="2" charset="-78"/>
               </a:rPr>
               <a:t>المِهَنُ مِنْ حَوْلِي</a:t>
@@ -15796,6 +15923,7 @@
                   <a:srgbClr val="1B3B6F"/>
                 </a:solidFill>
                 <a:latin typeface="Amiri" pitchFamily="2" charset="-78"/>
+                <a:ea typeface="Amiri" pitchFamily="2" charset="-78"/>
                 <a:cs typeface="Amiri" pitchFamily="2" charset="-78"/>
               </a:rPr>
               <a:t>أَبِي …</a:t>
@@ -15872,6 +16000,7 @@
                   <a:srgbClr val="1B3B6F"/>
                 </a:solidFill>
                 <a:latin typeface="Amiri" pitchFamily="2" charset="-78"/>
+                <a:ea typeface="Amiri" pitchFamily="2" charset="-78"/>
                 <a:cs typeface="Amiri" pitchFamily="2" charset="-78"/>
               </a:rPr>
               <a:t>مَاذَا يَعْمَلُ وَالِدُكَ؟</a:t>
@@ -16040,6 +16169,7 @@
                   <a:srgbClr val="1B3B6F"/>
                 </a:solidFill>
                 <a:latin typeface="Amiri" pitchFamily="2" charset="-78"/>
+                <a:ea typeface="Amiri" pitchFamily="2" charset="-78"/>
                 <a:cs typeface="Amiri" pitchFamily="2" charset="-78"/>
               </a:rPr>
               <a:t>أُمِّي …</a:t>
@@ -16116,6 +16246,7 @@
                   <a:srgbClr val="1B3B6F"/>
                 </a:solidFill>
                 <a:latin typeface="Amiri" pitchFamily="2" charset="-78"/>
+                <a:ea typeface="Amiri" pitchFamily="2" charset="-78"/>
                 <a:cs typeface="Amiri" pitchFamily="2" charset="-78"/>
               </a:rPr>
               <a:t>وَمَاذَا تَعْمَلُ وَالِدَتُكَ؟</a:t>
@@ -16284,6 +16415,7 @@
                   <a:srgbClr val="1B3B6F"/>
                 </a:solidFill>
                 <a:latin typeface="Amiri" pitchFamily="2" charset="-78"/>
+                <a:ea typeface="Amiri" pitchFamily="2" charset="-78"/>
                 <a:cs typeface="Amiri" pitchFamily="2" charset="-78"/>
               </a:rPr>
               <a:t>يَعْمَلُ الطَّبِيبُ فِي …</a:t>
@@ -16360,6 +16492,7 @@
                   <a:srgbClr val="1B3B6F"/>
                 </a:solidFill>
                 <a:latin typeface="Amiri" pitchFamily="2" charset="-78"/>
+                <a:ea typeface="Amiri" pitchFamily="2" charset="-78"/>
                 <a:cs typeface="Amiri" pitchFamily="2" charset="-78"/>
               </a:rPr>
               <a:t>أَيْنَ يَعْمَلُ الطَّبِيبُ؟</a:t>
@@ -16528,6 +16661,7 @@
                   <a:srgbClr val="1B3B6F"/>
                 </a:solidFill>
                 <a:latin typeface="Amiri" pitchFamily="2" charset="-78"/>
+                <a:ea typeface="Amiri" pitchFamily="2" charset="-78"/>
                 <a:cs typeface="Amiri" pitchFamily="2" charset="-78"/>
               </a:rPr>
               <a:t>أُحِبُّ مِهْنَةَ …</a:t>
@@ -16604,6 +16738,7 @@
                   <a:srgbClr val="1B3B6F"/>
                 </a:solidFill>
                 <a:latin typeface="Amiri" pitchFamily="2" charset="-78"/>
+                <a:ea typeface="Amiri" pitchFamily="2" charset="-78"/>
                 <a:cs typeface="Amiri" pitchFamily="2" charset="-78"/>
               </a:rPr>
               <a:t>مَا المِهْنَةُ الَّتِي تُحِبُّهَا؟</a:t>
@@ -16772,6 +16907,7 @@
                   <a:srgbClr val="1B3B6F"/>
                 </a:solidFill>
                 <a:latin typeface="Amiri" pitchFamily="2" charset="-78"/>
+                <a:ea typeface="Amiri" pitchFamily="2" charset="-78"/>
                 <a:cs typeface="Amiri" pitchFamily="2" charset="-78"/>
               </a:rPr>
               <a:t>نَعَمْ / لَا، لِأَنَّ …</a:t>
@@ -16848,6 +16984,7 @@
                   <a:srgbClr val="1B3B6F"/>
                 </a:solidFill>
                 <a:latin typeface="Amiri" pitchFamily="2" charset="-78"/>
+                <a:ea typeface="Amiri" pitchFamily="2" charset="-78"/>
                 <a:cs typeface="Amiri" pitchFamily="2" charset="-78"/>
               </a:rPr>
               <a:t>هَلْ تُرِيدُ أَنْ تَعْمَلَ فِي مَكْتَبٍ؟</a:t>
@@ -17002,6 +17139,7 @@
                   <a:srgbClr val="1B3B6F"/>
                 </a:solidFill>
                 <a:latin typeface="Amiri" pitchFamily="2" charset="-78"/>
+                <a:ea typeface="Amiri" pitchFamily="2" charset="-78"/>
                 <a:cs typeface="Amiri" pitchFamily="2" charset="-78"/>
               </a:rPr>
               <a:t>عَفْوًا، هَلْ يُمْكِنُ أَنْ تُعِيدَ السُّؤَالَ؟</a:t>
@@ -17135,6 +17273,7 @@
                   <a:srgbClr val="D4AF37"/>
                 </a:solidFill>
                 <a:latin typeface="Amiri" pitchFamily="2" charset="-78"/>
+                <a:ea typeface="Amiri" pitchFamily="2" charset="-78"/>
                 <a:cs typeface="Amiri" pitchFamily="2" charset="-78"/>
               </a:rPr>
               <a:t>م</a:t>
@@ -17455,6 +17594,7 @@
                   <a:srgbClr val="8A6D1E"/>
                 </a:solidFill>
                 <a:latin typeface="Amiri" pitchFamily="2" charset="-78"/>
+                <a:ea typeface="Amiri" pitchFamily="2" charset="-78"/>
                 <a:cs typeface="Amiri" pitchFamily="2" charset="-78"/>
               </a:rPr>
               <a:t>عَالَمُ المِهَنِ</a:t>
@@ -17735,6 +17875,7 @@
                   <a:srgbClr val="1B3B6F"/>
                 </a:solidFill>
                 <a:latin typeface="Amiri" pitchFamily="2" charset="-78"/>
+                <a:ea typeface="Amiri" pitchFamily="2" charset="-78"/>
                 <a:cs typeface="Amiri" pitchFamily="2" charset="-78"/>
               </a:rPr>
               <a:t>… يَعْمَلُ / تَعْمَلُ … وَيُسَاعِدُ / وَتُسَاعِدُ …</a:t>
@@ -17811,6 +17952,7 @@
                   <a:srgbClr val="1B3B6F"/>
                 </a:solidFill>
                 <a:latin typeface="Amiri" pitchFamily="2" charset="-78"/>
+                <a:ea typeface="Amiri" pitchFamily="2" charset="-78"/>
                 <a:cs typeface="Amiri" pitchFamily="2" charset="-78"/>
               </a:rPr>
               <a:t>صِفْ عَمَلَ أَحَدِ أَفْرَادِ أُسْرَتِكَ.</a:t>
@@ -17914,6 +18056,7 @@
                   <a:srgbClr val="1B3B6F"/>
                 </a:solidFill>
                 <a:latin typeface="Amiri" pitchFamily="2" charset="-78"/>
+                <a:ea typeface="Amiri" pitchFamily="2" charset="-78"/>
                 <a:cs typeface="Amiri" pitchFamily="2" charset="-78"/>
               </a:rPr>
               <a:t>مِنْ مَزَايَاهَا … وَمِنْ عُيُوبِهَا …</a:t>
@@ -17990,6 +18133,7 @@
                   <a:srgbClr val="1B3B6F"/>
                 </a:solidFill>
                 <a:latin typeface="Amiri" pitchFamily="2" charset="-78"/>
+                <a:ea typeface="Amiri" pitchFamily="2" charset="-78"/>
                 <a:cs typeface="Amiri" pitchFamily="2" charset="-78"/>
               </a:rPr>
               <a:t>مَا مَزَايَا مِهْنَةِ المُعَلِّمِ وَعُيُوبُهَا؟</a:t>
@@ -18093,6 +18237,7 @@
                   <a:srgbClr val="1B3B6F"/>
                 </a:solidFill>
                 <a:latin typeface="Amiri" pitchFamily="2" charset="-78"/>
+                <a:ea typeface="Amiri" pitchFamily="2" charset="-78"/>
                 <a:cs typeface="Amiri" pitchFamily="2" charset="-78"/>
               </a:rPr>
               <a:t>عِنْدَمَا كُنْتُ صَغِيرًا، كُنْتُ أُرِيدُ …</a:t>
@@ -18169,6 +18314,7 @@
                   <a:srgbClr val="1B3B6F"/>
                 </a:solidFill>
                 <a:latin typeface="Amiri" pitchFamily="2" charset="-78"/>
+                <a:ea typeface="Amiri" pitchFamily="2" charset="-78"/>
                 <a:cs typeface="Amiri" pitchFamily="2" charset="-78"/>
               </a:rPr>
               <a:t>مَاذَا أَرَدْتَ أَنْ تَكُونَ عِنْدَمَا كُنْتَ صَغِيرًا؟</a:t>
@@ -18272,6 +18418,7 @@
                   <a:srgbClr val="1B3B6F"/>
                 </a:solidFill>
                 <a:latin typeface="Amiri" pitchFamily="2" charset="-78"/>
+                <a:ea typeface="Amiri" pitchFamily="2" charset="-78"/>
                 <a:cs typeface="Amiri" pitchFamily="2" charset="-78"/>
               </a:rPr>
               <a:t>… أَصْعَبُ، لِأَنَّ … بَيْنَمَا …</a:t>
@@ -18348,6 +18495,7 @@
                   <a:srgbClr val="1B3B6F"/>
                 </a:solidFill>
                 <a:latin typeface="Amiri" pitchFamily="2" charset="-78"/>
+                <a:ea typeface="Amiri" pitchFamily="2" charset="-78"/>
                 <a:cs typeface="Amiri" pitchFamily="2" charset="-78"/>
               </a:rPr>
               <a:t>أَيُّهُمَا أَصْعَبُ: الطِّبُّ أَمِ الهَنْدَسَةُ؟</a:t>
@@ -18451,6 +18599,7 @@
                   <a:srgbClr val="1B3B6F"/>
                 </a:solidFill>
                 <a:latin typeface="Amiri" pitchFamily="2" charset="-78"/>
+                <a:ea typeface="Amiri" pitchFamily="2" charset="-78"/>
                 <a:cs typeface="Amiri" pitchFamily="2" charset="-78"/>
               </a:rPr>
               <a:t>سَأَكُونُ … لِأَنِّي …</a:t>
@@ -18527,6 +18676,7 @@
                   <a:srgbClr val="1B3B6F"/>
                 </a:solidFill>
                 <a:latin typeface="Amiri" pitchFamily="2" charset="-78"/>
+                <a:ea typeface="Amiri" pitchFamily="2" charset="-78"/>
                 <a:cs typeface="Amiri" pitchFamily="2" charset="-78"/>
               </a:rPr>
               <a:t>مَا المِهْنَةُ الَّتِي سَتَخْتَارُهَا؟ وَلِمَاذَا؟</a:t>
@@ -18736,6 +18886,7 @@
                   <a:srgbClr val="D4AF37"/>
                 </a:solidFill>
                 <a:latin typeface="Amiri" pitchFamily="2" charset="-78"/>
+                <a:ea typeface="Amiri" pitchFamily="2" charset="-78"/>
                 <a:cs typeface="Amiri" pitchFamily="2" charset="-78"/>
               </a:rPr>
               <a:t>م</a:t>
@@ -19056,6 +19207,7 @@
                   <a:srgbClr val="8A6D1E"/>
                 </a:solidFill>
                 <a:latin typeface="Amiri" pitchFamily="2" charset="-78"/>
+                <a:ea typeface="Amiri" pitchFamily="2" charset="-78"/>
                 <a:cs typeface="Amiri" pitchFamily="2" charset="-78"/>
               </a:rPr>
               <a:t>العَمَلُ وَالمُجْتَمَعُ</a:t>
@@ -19336,6 +19488,7 @@
                   <a:srgbClr val="1B3B6F"/>
                 </a:solidFill>
                 <a:latin typeface="Amiri" pitchFamily="2" charset="-78"/>
+                <a:ea typeface="Amiri" pitchFamily="2" charset="-78"/>
                 <a:cs typeface="Amiri" pitchFamily="2" charset="-78"/>
               </a:rPr>
               <a:t>لَا أَعْتَقِدُ ذٰلِكَ؛ فَاليَوْمَ …</a:t>
@@ -19412,6 +19565,7 @@
                   <a:srgbClr val="1B3B6F"/>
                 </a:solidFill>
                 <a:latin typeface="Amiri" pitchFamily="2" charset="-78"/>
+                <a:ea typeface="Amiri" pitchFamily="2" charset="-78"/>
                 <a:cs typeface="Amiri" pitchFamily="2" charset="-78"/>
               </a:rPr>
               <a:t>هَلْ هُنَاكَ مِهَنٌ لِلرِّجَالِ وَمِهَنٌ لِلنِّسَاءِ؟</a:t>
@@ -19515,6 +19669,7 @@
                   <a:srgbClr val="1B3B6F"/>
                 </a:solidFill>
                 <a:latin typeface="Amiri" pitchFamily="2" charset="-78"/>
+                <a:ea typeface="Amiri" pitchFamily="2" charset="-78"/>
                 <a:cs typeface="Amiri" pitchFamily="2" charset="-78"/>
               </a:rPr>
               <a:t>بِسَبَبِ … مِمَّا …</a:t>
@@ -19591,6 +19746,7 @@
                   <a:srgbClr val="1B3B6F"/>
                 </a:solidFill>
                 <a:latin typeface="Amiri" pitchFamily="2" charset="-78"/>
+                <a:ea typeface="Amiri" pitchFamily="2" charset="-78"/>
                 <a:cs typeface="Amiri" pitchFamily="2" charset="-78"/>
               </a:rPr>
               <a:t>لِمَاذَا تُدْفَعُ رَوَاتِبُ عَالِيَةٌ لِلَاعِبِي كُرَةِ القَدَمِ؟</a:t>
@@ -19694,6 +19850,7 @@
                   <a:srgbClr val="1B3B6F"/>
                 </a:solidFill>
                 <a:latin typeface="Amiri" pitchFamily="2" charset="-78"/>
+                <a:ea typeface="Amiri" pitchFamily="2" charset="-78"/>
                 <a:cs typeface="Amiri" pitchFamily="2" charset="-78"/>
               </a:rPr>
               <a:t>مِنْ نَاحِيَةٍ … وَمِنْ نَاحِيَةٍ أُخْرَى …</a:t>
@@ -19770,6 +19927,7 @@
                   <a:srgbClr val="1B3B6F"/>
                 </a:solidFill>
                 <a:latin typeface="Amiri" pitchFamily="2" charset="-78"/>
+                <a:ea typeface="Amiri" pitchFamily="2" charset="-78"/>
                 <a:cs typeface="Amiri" pitchFamily="2" charset="-78"/>
               </a:rPr>
               <a:t>هَلِ العَمَلُ مِنَ البَيْتِ أَفْضَلُ؟</a:t>
@@ -19873,6 +20031,7 @@
                   <a:srgbClr val="1B3B6F"/>
                 </a:solidFill>
                 <a:latin typeface="Amiri" pitchFamily="2" charset="-78"/>
+                <a:ea typeface="Amiri" pitchFamily="2" charset="-78"/>
                 <a:cs typeface="Amiri" pitchFamily="2" charset="-78"/>
               </a:rPr>
               <a:t>كَانَ مُعْظَمُ النَّاسِ … أَمَّا اليَوْمَ فَظَهَرَتْ …</a:t>
@@ -19949,6 +20108,7 @@
                   <a:srgbClr val="1B3B6F"/>
                 </a:solidFill>
                 <a:latin typeface="Amiri" pitchFamily="2" charset="-78"/>
+                <a:ea typeface="Amiri" pitchFamily="2" charset="-78"/>
                 <a:cs typeface="Amiri" pitchFamily="2" charset="-78"/>
               </a:rPr>
               <a:t>كَيْفَ كَانَتِ المِهَنُ فِي زَمَنِ أَجْدَادِكَ؟</a:t>
@@ -20052,6 +20212,7 @@
                   <a:srgbClr val="1B3B6F"/>
                 </a:solidFill>
                 <a:latin typeface="Amiri" pitchFamily="2" charset="-78"/>
+                <a:ea typeface="Amiri" pitchFamily="2" charset="-78"/>
                 <a:cs typeface="Amiri" pitchFamily="2" charset="-78"/>
               </a:rPr>
               <a:t>لَوْ لَمْ أَحْتَجْ …، لَعَمِلْتُ …</a:t>
@@ -20128,6 +20289,7 @@
                   <a:srgbClr val="1B3B6F"/>
                 </a:solidFill>
                 <a:latin typeface="Amiri" pitchFamily="2" charset="-78"/>
+                <a:ea typeface="Amiri" pitchFamily="2" charset="-78"/>
                 <a:cs typeface="Amiri" pitchFamily="2" charset="-78"/>
               </a:rPr>
               <a:t>لَوْ لَمْ تَحْتَجْ إِلَى المَالِ، هَلْ كُنْتَ سَتَعْمَلُ؟</a:t>
@@ -20337,6 +20499,7 @@
                   <a:srgbClr val="D4AF37"/>
                 </a:solidFill>
                 <a:latin typeface="Amiri" pitchFamily="2" charset="-78"/>
+                <a:ea typeface="Amiri" pitchFamily="2" charset="-78"/>
                 <a:cs typeface="Amiri" pitchFamily="2" charset="-78"/>
               </a:rPr>
               <a:t>م</a:t>
@@ -20657,6 +20820,7 @@
                   <a:srgbClr val="8A6D1E"/>
                 </a:solidFill>
                 <a:latin typeface="Amiri" pitchFamily="2" charset="-78"/>
+                <a:ea typeface="Amiri" pitchFamily="2" charset="-78"/>
                 <a:cs typeface="Amiri" pitchFamily="2" charset="-78"/>
               </a:rPr>
               <a:t>آدَابُ الصَّفِّ</a:t>
@@ -22188,6 +22352,7 @@
                   <a:srgbClr val="D4AF37"/>
                 </a:solidFill>
                 <a:latin typeface="Amiri" pitchFamily="2" charset="-78"/>
+                <a:ea typeface="Amiri" pitchFamily="2" charset="-78"/>
                 <a:cs typeface="Amiri" pitchFamily="2" charset="-78"/>
               </a:rPr>
               <a:t>م</a:t>
@@ -22508,6 +22673,7 @@
                   <a:srgbClr val="8A6D1E"/>
                 </a:solidFill>
                 <a:latin typeface="Amiri" pitchFamily="2" charset="-78"/>
+                <a:ea typeface="Amiri" pitchFamily="2" charset="-78"/>
                 <a:cs typeface="Amiri" pitchFamily="2" charset="-78"/>
               </a:rPr>
               <a:t>نَمُوذَجُ الإِجَابَةِ</a:t>
@@ -22750,6 +22916,7 @@
                   <a:srgbClr val="1B3B6F"/>
                 </a:solidFill>
                 <a:latin typeface="Amiri" pitchFamily="2" charset="-78"/>
+                <a:ea typeface="Amiri" pitchFamily="2" charset="-78"/>
                 <a:cs typeface="Amiri" pitchFamily="2" charset="-78"/>
               </a:rPr>
               <a:t>أَبِي سَائِقُ حَافِلَةٍ.</a:t>
@@ -22826,6 +22993,7 @@
                   <a:srgbClr val="1B3B6F"/>
                 </a:solidFill>
                 <a:latin typeface="Amiri" pitchFamily="2" charset="-78"/>
+                <a:ea typeface="Amiri" pitchFamily="2" charset="-78"/>
                 <a:cs typeface="Amiri" pitchFamily="2" charset="-78"/>
               </a:rPr>
               <a:t>مَاذَا يَعْمَلُ وَالِدُكَ؟</a:t>
@@ -22929,6 +23097,7 @@
                   <a:srgbClr val="1B3B6F"/>
                 </a:solidFill>
                 <a:latin typeface="Amiri" pitchFamily="2" charset="-78"/>
+                <a:ea typeface="Amiri" pitchFamily="2" charset="-78"/>
                 <a:cs typeface="Amiri" pitchFamily="2" charset="-78"/>
               </a:rPr>
               <a:t>أُمِّي مُعَلِّمَةُ رِيَاضِيَّاتٍ.</a:t>
@@ -23005,6 +23174,7 @@
                   <a:srgbClr val="1B3B6F"/>
                 </a:solidFill>
                 <a:latin typeface="Amiri" pitchFamily="2" charset="-78"/>
+                <a:ea typeface="Amiri" pitchFamily="2" charset="-78"/>
                 <a:cs typeface="Amiri" pitchFamily="2" charset="-78"/>
               </a:rPr>
               <a:t>وَمَاذَا تَعْمَلُ وَالِدَتُكَ؟</a:t>
@@ -23108,6 +23278,7 @@
                   <a:srgbClr val="1B3B6F"/>
                 </a:solidFill>
                 <a:latin typeface="Amiri" pitchFamily="2" charset="-78"/>
+                <a:ea typeface="Amiri" pitchFamily="2" charset="-78"/>
                 <a:cs typeface="Amiri" pitchFamily="2" charset="-78"/>
               </a:rPr>
               <a:t>يَعْمَلُ الطَّبِيبُ فِي المُسْتَشْفَى أَوْ فِي العِيَادَةِ.</a:t>
@@ -23184,6 +23355,7 @@
                   <a:srgbClr val="1B3B6F"/>
                 </a:solidFill>
                 <a:latin typeface="Amiri" pitchFamily="2" charset="-78"/>
+                <a:ea typeface="Amiri" pitchFamily="2" charset="-78"/>
                 <a:cs typeface="Amiri" pitchFamily="2" charset="-78"/>
               </a:rPr>
               <a:t>أَيْنَ يَعْمَلُ الطَّبِيبُ؟</a:t>
@@ -23287,6 +23459,7 @@
                   <a:srgbClr val="1B3B6F"/>
                 </a:solidFill>
                 <a:latin typeface="Amiri" pitchFamily="2" charset="-78"/>
+                <a:ea typeface="Amiri" pitchFamily="2" charset="-78"/>
                 <a:cs typeface="Amiri" pitchFamily="2" charset="-78"/>
               </a:rPr>
               <a:t>أُحِبُّ مِهْنَةَ الصَّحَفِيِّ.</a:t>
@@ -23363,6 +23536,7 @@
                   <a:srgbClr val="1B3B6F"/>
                 </a:solidFill>
                 <a:latin typeface="Amiri" pitchFamily="2" charset="-78"/>
+                <a:ea typeface="Amiri" pitchFamily="2" charset="-78"/>
                 <a:cs typeface="Amiri" pitchFamily="2" charset="-78"/>
               </a:rPr>
               <a:t>مَا المِهْنَةُ الَّتِي تُحِبُّهَا؟</a:t>
@@ -23466,6 +23640,7 @@
                   <a:srgbClr val="1B3B6F"/>
                 </a:solidFill>
                 <a:latin typeface="Amiri" pitchFamily="2" charset="-78"/>
+                <a:ea typeface="Amiri" pitchFamily="2" charset="-78"/>
                 <a:cs typeface="Amiri" pitchFamily="2" charset="-78"/>
               </a:rPr>
               <a:t>لَا، لِأَنِّي أُحِبُّ العَمَلَ فِي الخَارِجِ.</a:t>
@@ -23542,6 +23717,7 @@
                   <a:srgbClr val="1B3B6F"/>
                 </a:solidFill>
                 <a:latin typeface="Amiri" pitchFamily="2" charset="-78"/>
+                <a:ea typeface="Amiri" pitchFamily="2" charset="-78"/>
                 <a:cs typeface="Amiri" pitchFamily="2" charset="-78"/>
               </a:rPr>
               <a:t>هَلْ تُرِيدُ أَنْ تَعْمَلَ فِي مَكْتَبٍ؟</a:t>
@@ -23751,6 +23927,7 @@
                   <a:srgbClr val="D4AF37"/>
                 </a:solidFill>
                 <a:latin typeface="Amiri" pitchFamily="2" charset="-78"/>
+                <a:ea typeface="Amiri" pitchFamily="2" charset="-78"/>
                 <a:cs typeface="Amiri" pitchFamily="2" charset="-78"/>
               </a:rPr>
               <a:t>م</a:t>
@@ -24071,6 +24248,7 @@
                   <a:srgbClr val="8A6D1E"/>
                 </a:solidFill>
                 <a:latin typeface="Amiri" pitchFamily="2" charset="-78"/>
+                <a:ea typeface="Amiri" pitchFamily="2" charset="-78"/>
                 <a:cs typeface="Amiri" pitchFamily="2" charset="-78"/>
               </a:rPr>
               <a:t>نَمُوذَجُ الإِجَابَةِ</a:t>
@@ -24313,6 +24491,7 @@
                   <a:srgbClr val="1B3B6F"/>
                 </a:solidFill>
                 <a:latin typeface="Amiri" pitchFamily="2" charset="-78"/>
+                <a:ea typeface="Amiri" pitchFamily="2" charset="-78"/>
                 <a:cs typeface="Amiri" pitchFamily="2" charset="-78"/>
               </a:rPr>
               <a:t>عَمَّتِي صَيْدَلَانِيَّةٌ؛ تَعْمَلُ فِي صَيْدَلِيَّةٍ قُرْبَ بَيْتِنَا، وَتُسَاعِدُ المَرْضَى عَلَى فَهْمِ أَدْوِيَتِهِمْ.</a:t>
@@ -24389,6 +24568,7 @@
                   <a:srgbClr val="1B3B6F"/>
                 </a:solidFill>
                 <a:latin typeface="Amiri" pitchFamily="2" charset="-78"/>
+                <a:ea typeface="Amiri" pitchFamily="2" charset="-78"/>
                 <a:cs typeface="Amiri" pitchFamily="2" charset="-78"/>
               </a:rPr>
               <a:t>صِفْ عَمَلَ أَحَدِ أَفْرَادِ أُسْرَتِكَ.</a:t>
@@ -24492,6 +24672,7 @@
                   <a:srgbClr val="1B3B6F"/>
                 </a:solidFill>
                 <a:latin typeface="Amiri" pitchFamily="2" charset="-78"/>
+                <a:ea typeface="Amiri" pitchFamily="2" charset="-78"/>
                 <a:cs typeface="Amiri" pitchFamily="2" charset="-78"/>
               </a:rPr>
               <a:t>مِنْ مَزَايَاهَا العُطَلُ الطَّوِيلَةُ وَالعَمَلُ مَعَ الشَّبَابِ، وَمِنْ عُيُوبِهَا كَثْرَةُ التَّصْحِيحِ فِي المَسَاءِ.</a:t>
@@ -24568,6 +24749,7 @@
                   <a:srgbClr val="1B3B6F"/>
                 </a:solidFill>
                 <a:latin typeface="Amiri" pitchFamily="2" charset="-78"/>
+                <a:ea typeface="Amiri" pitchFamily="2" charset="-78"/>
                 <a:cs typeface="Amiri" pitchFamily="2" charset="-78"/>
               </a:rPr>
               <a:t>مَا مَزَايَا مِهْنَةِ المُعَلِّمِ وَعُيُوبُهَا؟</a:t>
@@ -24671,6 +24853,7 @@
                   <a:srgbClr val="1B3B6F"/>
                 </a:solidFill>
                 <a:latin typeface="Amiri" pitchFamily="2" charset="-78"/>
+                <a:ea typeface="Amiri" pitchFamily="2" charset="-78"/>
                 <a:cs typeface="Amiri" pitchFamily="2" charset="-78"/>
               </a:rPr>
               <a:t>عِنْدَمَا كُنْتُ صَغِيرًا، كُنْتُ أُرِيدُ أَنْ أَكُونَ رَجُلَ إِطْفَاءٍ، لِأَنِّي كُنْتُ أُحِبُّ السَّيَّارَاتِ الحَمْرَاءَ!</a:t>
@@ -24747,6 +24930,7 @@
                   <a:srgbClr val="1B3B6F"/>
                 </a:solidFill>
                 <a:latin typeface="Amiri" pitchFamily="2" charset="-78"/>
+                <a:ea typeface="Amiri" pitchFamily="2" charset="-78"/>
                 <a:cs typeface="Amiri" pitchFamily="2" charset="-78"/>
               </a:rPr>
               <a:t>مَاذَا أَرَدْتَ أَنْ تَكُونَ عِنْدَمَا كُنْتَ صَغِيرًا؟</a:t>
@@ -24850,6 +25034,7 @@
                   <a:srgbClr val="1B3B6F"/>
                 </a:solidFill>
                 <a:latin typeface="Amiri" pitchFamily="2" charset="-78"/>
+                <a:ea typeface="Amiri" pitchFamily="2" charset="-78"/>
                 <a:cs typeface="Amiri" pitchFamily="2" charset="-78"/>
               </a:rPr>
               <a:t>الطِّبُّ أَصْعَبُ فِي رَأْيِي، لِأَنَّ الطَّبِيبَ مَسْؤُولٌ عَنْ حَيَاةِ النَّاسِ، بَيْنَمَا يَعْمَلُ المُهَنْدِسُ عَلَى مَشَارِيعَ يُمْكِنُ إِصْلَاحُهَا.</a:t>
@@ -24926,6 +25111,7 @@
                   <a:srgbClr val="1B3B6F"/>
                 </a:solidFill>
                 <a:latin typeface="Amiri" pitchFamily="2" charset="-78"/>
+                <a:ea typeface="Amiri" pitchFamily="2" charset="-78"/>
                 <a:cs typeface="Amiri" pitchFamily="2" charset="-78"/>
               </a:rPr>
               <a:t>أَيُّهُمَا أَصْعَبُ: الطِّبُّ أَمِ الهَنْدَسَةُ؟</a:t>
@@ -25029,6 +25215,7 @@
                   <a:srgbClr val="1B3B6F"/>
                 </a:solidFill>
                 <a:latin typeface="Amiri" pitchFamily="2" charset="-78"/>
+                <a:ea typeface="Amiri" pitchFamily="2" charset="-78"/>
                 <a:cs typeface="Amiri" pitchFamily="2" charset="-78"/>
               </a:rPr>
               <a:t>سَأَكُونُ مُهَنْدِسَةً مِعْمَارِيَّةً، لِأَنِّي أُحِبُّ الرَّسْمَ وَالرِّيَاضِيَّاتِ مَعًا.</a:t>
@@ -25105,6 +25292,7 @@
                   <a:srgbClr val="1B3B6F"/>
                 </a:solidFill>
                 <a:latin typeface="Amiri" pitchFamily="2" charset="-78"/>
+                <a:ea typeface="Amiri" pitchFamily="2" charset="-78"/>
                 <a:cs typeface="Amiri" pitchFamily="2" charset="-78"/>
               </a:rPr>
               <a:t>مَا المِهْنَةُ الَّتِي سَتَخْتَارُهَا؟ وَلِمَاذَا؟</a:t>
@@ -25314,6 +25502,7 @@
                   <a:srgbClr val="D4AF37"/>
                 </a:solidFill>
                 <a:latin typeface="Amiri" pitchFamily="2" charset="-78"/>
+                <a:ea typeface="Amiri" pitchFamily="2" charset="-78"/>
                 <a:cs typeface="Amiri" pitchFamily="2" charset="-78"/>
               </a:rPr>
               <a:t>م</a:t>
@@ -25634,6 +25823,7 @@
                   <a:srgbClr val="8A6D1E"/>
                 </a:solidFill>
                 <a:latin typeface="Amiri" pitchFamily="2" charset="-78"/>
+                <a:ea typeface="Amiri" pitchFamily="2" charset="-78"/>
                 <a:cs typeface="Amiri" pitchFamily="2" charset="-78"/>
               </a:rPr>
               <a:t>نَمُوذَجُ الإِجَابَةِ</a:t>
@@ -25876,6 +26066,7 @@
                   <a:srgbClr val="1B3B6F"/>
                 </a:solidFill>
                 <a:latin typeface="Amiri" pitchFamily="2" charset="-78"/>
+                <a:ea typeface="Amiri" pitchFamily="2" charset="-78"/>
                 <a:cs typeface="Amiri" pitchFamily="2" charset="-78"/>
               </a:rPr>
               <a:t>لَا أَعْتَقِدُ ذٰلِكَ؛ فَاليَوْمَ نَرَى مُهَنْدِسَاتٍ وَطَيَّارَاتٍ، كَمَا نَرَى مُمَرِّضِينَ وَمُعَلِّمِينَ فِي رِيَاضِ الأَطْفَالِ.</a:t>
@@ -25952,6 +26143,7 @@
                   <a:srgbClr val="1B3B6F"/>
                 </a:solidFill>
                 <a:latin typeface="Amiri" pitchFamily="2" charset="-78"/>
+                <a:ea typeface="Amiri" pitchFamily="2" charset="-78"/>
                 <a:cs typeface="Amiri" pitchFamily="2" charset="-78"/>
               </a:rPr>
               <a:t>هَلْ هُنَاكَ مِهَنٌ لِلرِّجَالِ وَمِهَنٌ لِلنِّسَاءِ؟</a:t>
@@ -26055,6 +26247,7 @@
                   <a:srgbClr val="1B3B6F"/>
                 </a:solidFill>
                 <a:latin typeface="Amiri" pitchFamily="2" charset="-78"/>
+                <a:ea typeface="Amiri" pitchFamily="2" charset="-78"/>
                 <a:cs typeface="Amiri" pitchFamily="2" charset="-78"/>
               </a:rPr>
               <a:t>بِسَبَبِ الإِعْلَانَاتِ وَالمُشَاهَدَاتِ الضَّخْمَةِ، مِمَّا يَجْعَلُ رَوَاتِبَهُمْ أَعْلَى بِكَثِيرٍ مِنْ رَوَاتِبِ الأَطِبَّاءِ.</a:t>
@@ -26131,6 +26324,7 @@
                   <a:srgbClr val="1B3B6F"/>
                 </a:solidFill>
                 <a:latin typeface="Amiri" pitchFamily="2" charset="-78"/>
+                <a:ea typeface="Amiri" pitchFamily="2" charset="-78"/>
                 <a:cs typeface="Amiri" pitchFamily="2" charset="-78"/>
               </a:rPr>
               <a:t>لِمَاذَا تُدْفَعُ رَوَاتِبُ عَالِيَةٌ لِلَاعِبِي كُرَةِ القَدَمِ؟</a:t>
@@ -26234,6 +26428,7 @@
                   <a:srgbClr val="1B3B6F"/>
                 </a:solidFill>
                 <a:latin typeface="Amiri" pitchFamily="2" charset="-78"/>
+                <a:ea typeface="Amiri" pitchFamily="2" charset="-78"/>
                 <a:cs typeface="Amiri" pitchFamily="2" charset="-78"/>
               </a:rPr>
               <a:t>مِنْ نَاحِيَةٍ، يُوَفِّرُ وَقْتَ المُوَاصَلَاتِ، وَمِنْ نَاحِيَةٍ أُخْرَى، قَدْ يَشْعُرُ المُوَظَّفُ بِالوَحْدَةِ وَيَخْلِطُ بَيْنَ العَمَلِ وَالحَيَاةِ.</a:t>
@@ -26310,6 +26505,7 @@
                   <a:srgbClr val="1B3B6F"/>
                 </a:solidFill>
                 <a:latin typeface="Amiri" pitchFamily="2" charset="-78"/>
+                <a:ea typeface="Amiri" pitchFamily="2" charset="-78"/>
                 <a:cs typeface="Amiri" pitchFamily="2" charset="-78"/>
               </a:rPr>
               <a:t>هَلِ العَمَلُ مِنَ البَيْتِ أَفْضَلُ؟</a:t>
@@ -26519,6 +26715,7 @@
                   <a:srgbClr val="D4AF37"/>
                 </a:solidFill>
                 <a:latin typeface="Amiri" pitchFamily="2" charset="-78"/>
+                <a:ea typeface="Amiri" pitchFamily="2" charset="-78"/>
                 <a:cs typeface="Amiri" pitchFamily="2" charset="-78"/>
               </a:rPr>
               <a:t>م</a:t>
@@ -26839,6 +27036,7 @@
                   <a:srgbClr val="8A6D1E"/>
                 </a:solidFill>
                 <a:latin typeface="Amiri" pitchFamily="2" charset="-78"/>
+                <a:ea typeface="Amiri" pitchFamily="2" charset="-78"/>
                 <a:cs typeface="Amiri" pitchFamily="2" charset="-78"/>
               </a:rPr>
               <a:t>نَمُوذَجُ الإِجَابَةِ</a:t>
@@ -27081,6 +27279,7 @@
                   <a:srgbClr val="1B3B6F"/>
                 </a:solidFill>
                 <a:latin typeface="Amiri" pitchFamily="2" charset="-78"/>
+                <a:ea typeface="Amiri" pitchFamily="2" charset="-78"/>
                 <a:cs typeface="Amiri" pitchFamily="2" charset="-78"/>
               </a:rPr>
               <a:t>كَانَ مُعْظَمُ النَّاسِ يَعْمَلُونَ فِي الزِّرَاعَةِ أَوِ التِّجَارَةِ، أَمَّا اليَوْمَ فَظَهَرَتْ مِهَنٌ لَمْ يَتَخَيَّلُوهَا، كَمُصَمِّمِ التَّطْبِيقَاتِ.</a:t>
@@ -27157,6 +27356,7 @@
                   <a:srgbClr val="1B3B6F"/>
                 </a:solidFill>
                 <a:latin typeface="Amiri" pitchFamily="2" charset="-78"/>
+                <a:ea typeface="Amiri" pitchFamily="2" charset="-78"/>
                 <a:cs typeface="Amiri" pitchFamily="2" charset="-78"/>
               </a:rPr>
               <a:t>كَيْفَ كَانَتِ المِهَنُ فِي زَمَنِ أَجْدَادِكَ؟</a:t>
@@ -27260,6 +27460,7 @@
                   <a:srgbClr val="1B3B6F"/>
                 </a:solidFill>
                 <a:latin typeface="Amiri" pitchFamily="2" charset="-78"/>
+                <a:ea typeface="Amiri" pitchFamily="2" charset="-78"/>
                 <a:cs typeface="Amiri" pitchFamily="2" charset="-78"/>
               </a:rPr>
               <a:t>لَوْ لَمْ أَحْتَجْ إِلَى المَالِ، لَعَمِلْتُ مُتَطَوِّعًا مَعَ مُنَظَّمَةٍ إِنْسَانِيَّةٍ، لِأَنَّ العَمَلَ يُعْطِي الحَيَاةَ مَعْنًى.</a:t>
@@ -27336,6 +27537,7 @@
                   <a:srgbClr val="1B3B6F"/>
                 </a:solidFill>
                 <a:latin typeface="Amiri" pitchFamily="2" charset="-78"/>
+                <a:ea typeface="Amiri" pitchFamily="2" charset="-78"/>
                 <a:cs typeface="Amiri" pitchFamily="2" charset="-78"/>
               </a:rPr>
               <a:t>لَوْ لَمْ تَحْتَجْ إِلَى المَالِ، هَلْ كُنْتَ سَتَعْمَلُ؟</a:t>
@@ -27545,6 +27747,7 @@
                   <a:srgbClr val="D4AF37"/>
                 </a:solidFill>
                 <a:latin typeface="Amiri" pitchFamily="2" charset="-78"/>
+                <a:ea typeface="Amiri" pitchFamily="2" charset="-78"/>
                 <a:cs typeface="Amiri" pitchFamily="2" charset="-78"/>
               </a:rPr>
               <a:t>م</a:t>
@@ -27865,6 +28068,7 @@
                   <a:srgbClr val="8A6D1E"/>
                 </a:solidFill>
                 <a:latin typeface="Amiri" pitchFamily="2" charset="-78"/>
+                <a:ea typeface="Amiri" pitchFamily="2" charset="-78"/>
                 <a:cs typeface="Amiri" pitchFamily="2" charset="-78"/>
               </a:rPr>
               <a:t>قَيِّمْ عَمَلَكَ</a:t>
@@ -29109,6 +29313,7 @@
                   <a:srgbClr val="FFFFFF"/>
                 </a:solidFill>
                 <a:latin typeface="Amiri" pitchFamily="2" charset="-78"/>
+                <a:ea typeface="Amiri" pitchFamily="2" charset="-78"/>
                 <a:cs typeface="Amiri" pitchFamily="2" charset="-78"/>
               </a:rPr>
               <a:t>أَحْسَنْتُمْ! إِلَى اللِّقَاءِ</a:t>
@@ -29261,6 +29466,7 @@
                   <a:srgbClr val="D4AF37"/>
                 </a:solidFill>
                 <a:latin typeface="Amiri" pitchFamily="2" charset="-78"/>
+                <a:ea typeface="Amiri" pitchFamily="2" charset="-78"/>
                 <a:cs typeface="Amiri" pitchFamily="2" charset="-78"/>
               </a:rPr>
               <a:t>وَرْشَةُ الكِتَابَةِ</a:t>
@@ -29394,6 +29600,7 @@
                   <a:srgbClr val="D4AF37"/>
                 </a:solidFill>
                 <a:latin typeface="Amiri" pitchFamily="2" charset="-78"/>
+                <a:ea typeface="Amiri" pitchFamily="2" charset="-78"/>
                 <a:cs typeface="Amiri" pitchFamily="2" charset="-78"/>
               </a:rPr>
               <a:t>م</a:t>
@@ -29714,6 +29921,7 @@
                   <a:srgbClr val="8A6D1E"/>
                 </a:solidFill>
                 <a:latin typeface="Amiri" pitchFamily="2" charset="-78"/>
+                <a:ea typeface="Amiri" pitchFamily="2" charset="-78"/>
                 <a:cs typeface="Amiri" pitchFamily="2" charset="-78"/>
               </a:rPr>
               <a:t>خَرِيطَةُ الوَرْشَةِ</a:t>
@@ -30028,6 +30236,7 @@
                   <a:srgbClr val="1B3B6F"/>
                 </a:solidFill>
                 <a:latin typeface="Amiri" pitchFamily="2" charset="-78"/>
+                <a:ea typeface="Amiri" pitchFamily="2" charset="-78"/>
                 <a:cs typeface="Amiri" pitchFamily="2" charset="-78"/>
               </a:rPr>
               <a:t>كَيْفَ</a:t>
@@ -30304,6 +30513,7 @@
                   <a:srgbClr val="1E6B52"/>
                 </a:solidFill>
                 <a:latin typeface="Amiri" pitchFamily="2" charset="-78"/>
+                <a:ea typeface="Amiri" pitchFamily="2" charset="-78"/>
                 <a:cs typeface="Amiri" pitchFamily="2" charset="-78"/>
               </a:rPr>
               <a:t>تَمْثِيلُ الدَّوْرِ</a:t>
@@ -30580,6 +30790,7 @@
                   <a:srgbClr val="8A6D1E"/>
                 </a:solidFill>
                 <a:latin typeface="Amiri" pitchFamily="2" charset="-78"/>
+                <a:ea typeface="Amiri" pitchFamily="2" charset="-78"/>
                 <a:cs typeface="Amiri" pitchFamily="2" charset="-78"/>
               </a:rPr>
               <a:t>النَّمُوذَجُ</a:t>
@@ -30856,6 +31067,7 @@
                   <a:srgbClr val="1E6B52"/>
                 </a:solidFill>
                 <a:latin typeface="Amiri" pitchFamily="2" charset="-78"/>
+                <a:ea typeface="Amiri" pitchFamily="2" charset="-78"/>
                 <a:cs typeface="Amiri" pitchFamily="2" charset="-78"/>
               </a:rPr>
               <a:t>المُحَادَثَةُ</a:t>
@@ -31132,6 +31344,7 @@
                   <a:srgbClr val="8A6D1E"/>
                 </a:solidFill>
                 <a:latin typeface="Amiri" pitchFamily="2" charset="-78"/>
+                <a:ea typeface="Amiri" pitchFamily="2" charset="-78"/>
                 <a:cs typeface="Amiri" pitchFamily="2" charset="-78"/>
               </a:rPr>
               <a:t>قَيِّمْ</a:t>
@@ -31375,6 +31588,7 @@
                   <a:srgbClr val="D4AF37"/>
                 </a:solidFill>
                 <a:latin typeface="Amiri" pitchFamily="2" charset="-78"/>
+                <a:ea typeface="Amiri" pitchFamily="2" charset="-78"/>
                 <a:cs typeface="Amiri" pitchFamily="2" charset="-78"/>
               </a:rPr>
               <a:t>م</a:t>
@@ -31695,6 +31909,7 @@
                   <a:srgbClr val="8A6D1E"/>
                 </a:solidFill>
                 <a:latin typeface="Amiri" pitchFamily="2" charset="-78"/>
+                <a:ea typeface="Amiri" pitchFamily="2" charset="-78"/>
                 <a:cs typeface="Amiri" pitchFamily="2" charset="-78"/>
               </a:rPr>
               <a:t>امْتِحَانُ التَّحَدُّثِ</a:t>
@@ -32319,6 +32534,7 @@
                   <a:srgbClr val="1B3B6F"/>
                 </a:solidFill>
                 <a:latin typeface="Amiri" pitchFamily="2" charset="-78"/>
+                <a:ea typeface="Amiri" pitchFamily="2" charset="-78"/>
                 <a:cs typeface="Amiri" pitchFamily="2" charset="-78"/>
               </a:rPr>
               <a:t>عَفْوًا، هَلْ يُمْكِنُ أَنْ تُعِيدَ السُّؤَالَ؟</a:t>
@@ -32418,6 +32634,7 @@
                   <a:srgbClr val="1B3B6F"/>
                 </a:solidFill>
                 <a:latin typeface="Amiri" pitchFamily="2" charset="-78"/>
+                <a:ea typeface="Amiri" pitchFamily="2" charset="-78"/>
                 <a:cs typeface="Amiri" pitchFamily="2" charset="-78"/>
               </a:rPr>
               <a:t>لَحْظَةً، دَعْنِي أُفَكِّرُ …</a:t>
@@ -32517,6 +32734,7 @@
                   <a:srgbClr val="1B3B6F"/>
                 </a:solidFill>
                 <a:latin typeface="Amiri" pitchFamily="2" charset="-78"/>
+                <a:ea typeface="Amiri" pitchFamily="2" charset="-78"/>
                 <a:cs typeface="Amiri" pitchFamily="2" charset="-78"/>
               </a:rPr>
               <a:t>أَقْصِدُ …</a:t>
@@ -32688,6 +32906,7 @@
                   <a:srgbClr val="D4AF37"/>
                 </a:solidFill>
                 <a:latin typeface="Amiri" pitchFamily="2" charset="-78"/>
+                <a:ea typeface="Amiri" pitchFamily="2" charset="-78"/>
                 <a:cs typeface="Amiri" pitchFamily="2" charset="-78"/>
               </a:rPr>
               <a:t>م</a:t>
@@ -33008,6 +33227,7 @@
                   <a:srgbClr val="8A6D1E"/>
                 </a:solidFill>
                 <a:latin typeface="Amiri" pitchFamily="2" charset="-78"/>
+                <a:ea typeface="Amiri" pitchFamily="2" charset="-78"/>
                 <a:cs typeface="Amiri" pitchFamily="2" charset="-78"/>
               </a:rPr>
               <a:t>المِهَنُ</a:t>
@@ -33311,6 +33531,7 @@
                   <a:srgbClr val="1B3B6F"/>
                 </a:solidFill>
                 <a:latin typeface="Amiri" pitchFamily="2" charset="-78"/>
+                <a:ea typeface="Amiri" pitchFamily="2" charset="-78"/>
                 <a:cs typeface="Amiri" pitchFamily="2" charset="-78"/>
               </a:rPr>
               <a:t>طَبِيبٌ</a:t>
@@ -33468,6 +33689,7 @@
                   <a:srgbClr val="1B3B6F"/>
                 </a:solidFill>
                 <a:latin typeface="Amiri" pitchFamily="2" charset="-78"/>
+                <a:ea typeface="Amiri" pitchFamily="2" charset="-78"/>
                 <a:cs typeface="Amiri" pitchFamily="2" charset="-78"/>
               </a:rPr>
               <a:t>أَطِبَّاءُ</a:t>
@@ -33571,6 +33793,7 @@
                   <a:srgbClr val="1B3B6F"/>
                 </a:solidFill>
                 <a:latin typeface="Amiri" pitchFamily="2" charset="-78"/>
+                <a:ea typeface="Amiri" pitchFamily="2" charset="-78"/>
                 <a:cs typeface="Amiri" pitchFamily="2" charset="-78"/>
               </a:rPr>
               <a:t>طَبِيبَةٌ</a:t>
@@ -33836,6 +34059,7 @@
                   <a:srgbClr val="1B3B6F"/>
                 </a:solidFill>
                 <a:latin typeface="Amiri" pitchFamily="2" charset="-78"/>
+                <a:ea typeface="Amiri" pitchFamily="2" charset="-78"/>
                 <a:cs typeface="Amiri" pitchFamily="2" charset="-78"/>
               </a:rPr>
               <a:t>مُهَنْدِسٌ</a:t>
@@ -33993,6 +34217,7 @@
                   <a:srgbClr val="1B3B6F"/>
                 </a:solidFill>
                 <a:latin typeface="Amiri" pitchFamily="2" charset="-78"/>
+                <a:ea typeface="Amiri" pitchFamily="2" charset="-78"/>
                 <a:cs typeface="Amiri" pitchFamily="2" charset="-78"/>
               </a:rPr>
               <a:t>مُهَنْدِسُونَ</a:t>
@@ -34096,6 +34321,7 @@
                   <a:srgbClr val="1B3B6F"/>
                 </a:solidFill>
                 <a:latin typeface="Amiri" pitchFamily="2" charset="-78"/>
+                <a:ea typeface="Amiri" pitchFamily="2" charset="-78"/>
                 <a:cs typeface="Amiri" pitchFamily="2" charset="-78"/>
               </a:rPr>
               <a:t>مُهَنْدِسَةٌ</a:t>
@@ -34361,6 +34587,7 @@
                   <a:srgbClr val="1B3B6F"/>
                 </a:solidFill>
                 <a:latin typeface="Amiri" pitchFamily="2" charset="-78"/>
+                <a:ea typeface="Amiri" pitchFamily="2" charset="-78"/>
                 <a:cs typeface="Amiri" pitchFamily="2" charset="-78"/>
               </a:rPr>
               <a:t>مُعَلِّمٌ · مُدَرِّسٌ</a:t>
@@ -34518,6 +34745,7 @@
                   <a:srgbClr val="1B3B6F"/>
                 </a:solidFill>
                 <a:latin typeface="Amiri" pitchFamily="2" charset="-78"/>
+                <a:ea typeface="Amiri" pitchFamily="2" charset="-78"/>
                 <a:cs typeface="Amiri" pitchFamily="2" charset="-78"/>
               </a:rPr>
               <a:t>مُعَلِّمُونَ · مُعَلِّمَاتٌ</a:t>
@@ -34621,6 +34849,7 @@
                   <a:srgbClr val="1B3B6F"/>
                 </a:solidFill>
                 <a:latin typeface="Amiri" pitchFamily="2" charset="-78"/>
+                <a:ea typeface="Amiri" pitchFamily="2" charset="-78"/>
                 <a:cs typeface="Amiri" pitchFamily="2" charset="-78"/>
               </a:rPr>
               <a:t>مُعَلِّمَةٌ</a:t>
@@ -34886,6 +35115,7 @@
                   <a:srgbClr val="1B3B6F"/>
                 </a:solidFill>
                 <a:latin typeface="Amiri" pitchFamily="2" charset="-78"/>
+                <a:ea typeface="Amiri" pitchFamily="2" charset="-78"/>
                 <a:cs typeface="Amiri" pitchFamily="2" charset="-78"/>
               </a:rPr>
               <a:t>مُمَرِّضٌ</a:t>
@@ -35043,6 +35273,7 @@
                   <a:srgbClr val="1B3B6F"/>
                 </a:solidFill>
                 <a:latin typeface="Amiri" pitchFamily="2" charset="-78"/>
+                <a:ea typeface="Amiri" pitchFamily="2" charset="-78"/>
                 <a:cs typeface="Amiri" pitchFamily="2" charset="-78"/>
               </a:rPr>
               <a:t>مُمَرِّضُونَ · مُمَرِّضَاتٌ</a:t>
@@ -35146,6 +35377,7 @@
                   <a:srgbClr val="1B3B6F"/>
                 </a:solidFill>
                 <a:latin typeface="Amiri" pitchFamily="2" charset="-78"/>
+                <a:ea typeface="Amiri" pitchFamily="2" charset="-78"/>
                 <a:cs typeface="Amiri" pitchFamily="2" charset="-78"/>
               </a:rPr>
               <a:t>مُمَرِّضَةٌ</a:t>
@@ -35411,6 +35643,7 @@
                   <a:srgbClr val="1B3B6F"/>
                 </a:solidFill>
                 <a:latin typeface="Amiri" pitchFamily="2" charset="-78"/>
+                <a:ea typeface="Amiri" pitchFamily="2" charset="-78"/>
                 <a:cs typeface="Amiri" pitchFamily="2" charset="-78"/>
               </a:rPr>
               <a:t>مُحَامٍ</a:t>
@@ -35568,6 +35801,7 @@
                   <a:srgbClr val="1B3B6F"/>
                 </a:solidFill>
                 <a:latin typeface="Amiri" pitchFamily="2" charset="-78"/>
+                <a:ea typeface="Amiri" pitchFamily="2" charset="-78"/>
                 <a:cs typeface="Amiri" pitchFamily="2" charset="-78"/>
               </a:rPr>
               <a:t>مُحَامُونَ</a:t>
@@ -35671,6 +35905,7 @@
                   <a:srgbClr val="1B3B6F"/>
                 </a:solidFill>
                 <a:latin typeface="Amiri" pitchFamily="2" charset="-78"/>
+                <a:ea typeface="Amiri" pitchFamily="2" charset="-78"/>
                 <a:cs typeface="Amiri" pitchFamily="2" charset="-78"/>
               </a:rPr>
               <a:t>مُحَامِيَةٌ</a:t>
@@ -35774,6 +36009,7 @@
                   <a:srgbClr val="1B3B6F"/>
                 </a:solidFill>
                 <a:latin typeface="Amiri" pitchFamily="2" charset="-78"/>
+                <a:ea typeface="Amiri" pitchFamily="2" charset="-78"/>
                 <a:cs typeface="Amiri" pitchFamily="2" charset="-78"/>
               </a:rPr>
               <a:t>المُحَامِي</a:t>
@@ -36039,6 +36275,7 @@
                   <a:srgbClr val="1B3B6F"/>
                 </a:solidFill>
                 <a:latin typeface="Amiri" pitchFamily="2" charset="-78"/>
+                <a:ea typeface="Amiri" pitchFamily="2" charset="-78"/>
                 <a:cs typeface="Amiri" pitchFamily="2" charset="-78"/>
               </a:rPr>
               <a:t>صَحَفِيٌّ</a:t>
@@ -36196,6 +36433,7 @@
                   <a:srgbClr val="1B3B6F"/>
                 </a:solidFill>
                 <a:latin typeface="Amiri" pitchFamily="2" charset="-78"/>
+                <a:ea typeface="Amiri" pitchFamily="2" charset="-78"/>
                 <a:cs typeface="Amiri" pitchFamily="2" charset="-78"/>
               </a:rPr>
               <a:t>صَحَفِيُّونَ</a:t>
@@ -36299,6 +36537,7 @@
                   <a:srgbClr val="1B3B6F"/>
                 </a:solidFill>
                 <a:latin typeface="Amiri" pitchFamily="2" charset="-78"/>
+                <a:ea typeface="Amiri" pitchFamily="2" charset="-78"/>
                 <a:cs typeface="Amiri" pitchFamily="2" charset="-78"/>
               </a:rPr>
               <a:t>صَحَفِيَّةٌ</a:t>
@@ -36432,6 +36671,7 @@
                   <a:srgbClr val="D4AF37"/>
                 </a:solidFill>
                 <a:latin typeface="Amiri" pitchFamily="2" charset="-78"/>
+                <a:ea typeface="Amiri" pitchFamily="2" charset="-78"/>
                 <a:cs typeface="Amiri" pitchFamily="2" charset="-78"/>
               </a:rPr>
               <a:t>م</a:t>
@@ -36752,6 +36992,7 @@
                   <a:srgbClr val="8A6D1E"/>
                 </a:solidFill>
                 <a:latin typeface="Amiri" pitchFamily="2" charset="-78"/>
+                <a:ea typeface="Amiri" pitchFamily="2" charset="-78"/>
                 <a:cs typeface="Amiri" pitchFamily="2" charset="-78"/>
               </a:rPr>
               <a:t>وَصْفُ العَمَلِ</a:t>
@@ -37055,6 +37296,7 @@
                   <a:srgbClr val="1B3B6F"/>
                 </a:solidFill>
                 <a:latin typeface="Amiri" pitchFamily="2" charset="-78"/>
+                <a:ea typeface="Amiri" pitchFamily="2" charset="-78"/>
                 <a:cs typeface="Amiri" pitchFamily="2" charset="-78"/>
               </a:rPr>
               <a:t>طَبَّاخٌ · طَاهٍ</a:t>
@@ -37212,6 +37454,7 @@
                   <a:srgbClr val="1B3B6F"/>
                 </a:solidFill>
                 <a:latin typeface="Amiri" pitchFamily="2" charset="-78"/>
+                <a:ea typeface="Amiri" pitchFamily="2" charset="-78"/>
                 <a:cs typeface="Amiri" pitchFamily="2" charset="-78"/>
               </a:rPr>
               <a:t>طُهَاةٌ</a:t>
@@ -37315,6 +37558,7 @@
                   <a:srgbClr val="1B3B6F"/>
                 </a:solidFill>
                 <a:latin typeface="Amiri" pitchFamily="2" charset="-78"/>
+                <a:ea typeface="Amiri" pitchFamily="2" charset="-78"/>
                 <a:cs typeface="Amiri" pitchFamily="2" charset="-78"/>
               </a:rPr>
               <a:t>طَبَّاخَةٌ</a:t>
@@ -37580,6 +37824,7 @@
                   <a:srgbClr val="1B3B6F"/>
                 </a:solidFill>
                 <a:latin typeface="Amiri" pitchFamily="2" charset="-78"/>
+                <a:ea typeface="Amiri" pitchFamily="2" charset="-78"/>
                 <a:cs typeface="Amiri" pitchFamily="2" charset="-78"/>
               </a:rPr>
               <a:t>مُبَرْمِجٌ</a:t>
@@ -37737,6 +37982,7 @@
                   <a:srgbClr val="1B3B6F"/>
                 </a:solidFill>
                 <a:latin typeface="Amiri" pitchFamily="2" charset="-78"/>
+                <a:ea typeface="Amiri" pitchFamily="2" charset="-78"/>
                 <a:cs typeface="Amiri" pitchFamily="2" charset="-78"/>
               </a:rPr>
               <a:t>مُبَرْمِجُونَ</a:t>
@@ -37840,6 +38086,7 @@
                   <a:srgbClr val="1B3B6F"/>
                 </a:solidFill>
                 <a:latin typeface="Amiri" pitchFamily="2" charset="-78"/>
+                <a:ea typeface="Amiri" pitchFamily="2" charset="-78"/>
                 <a:cs typeface="Amiri" pitchFamily="2" charset="-78"/>
               </a:rPr>
               <a:t>مُبَرْمِجَةٌ</a:t>
@@ -38105,6 +38352,7 @@
                   <a:srgbClr val="1B3B6F"/>
                 </a:solidFill>
                 <a:latin typeface="Amiri" pitchFamily="2" charset="-78"/>
+                <a:ea typeface="Amiri" pitchFamily="2" charset="-78"/>
                 <a:cs typeface="Amiri" pitchFamily="2" charset="-78"/>
               </a:rPr>
               <a:t>يَعْمَلُ فِي …</a:t>
@@ -38262,6 +38510,7 @@
                   <a:srgbClr val="1B3B6F"/>
                 </a:solidFill>
                 <a:latin typeface="Amiri" pitchFamily="2" charset="-78"/>
+                <a:ea typeface="Amiri" pitchFamily="2" charset="-78"/>
                 <a:cs typeface="Amiri" pitchFamily="2" charset="-78"/>
               </a:rPr>
               <a:t>العَمَلُ</a:t>
@@ -38365,6 +38614,7 @@
                   <a:srgbClr val="1B3B6F"/>
                 </a:solidFill>
                 <a:latin typeface="Amiri" pitchFamily="2" charset="-78"/>
+                <a:ea typeface="Amiri" pitchFamily="2" charset="-78"/>
                 <a:cs typeface="Amiri" pitchFamily="2" charset="-78"/>
               </a:rPr>
               <a:t>يَعْمَلُونَ</a:t>
@@ -38468,6 +38718,7 @@
                   <a:srgbClr val="1B3B6F"/>
                 </a:solidFill>
                 <a:latin typeface="Amiri" pitchFamily="2" charset="-78"/>
+                <a:ea typeface="Amiri" pitchFamily="2" charset="-78"/>
                 <a:cs typeface="Amiri" pitchFamily="2" charset="-78"/>
               </a:rPr>
               <a:t>تَعْمَلُ</a:t>
@@ -38733,6 +38984,7 @@
                   <a:srgbClr val="1B3B6F"/>
                 </a:solidFill>
                 <a:latin typeface="Amiri" pitchFamily="2" charset="-78"/>
+                <a:ea typeface="Amiri" pitchFamily="2" charset="-78"/>
                 <a:cs typeface="Amiri" pitchFamily="2" charset="-78"/>
               </a:rPr>
               <a:t>رَاتِبٌ</a:t>
@@ -38890,6 +39142,7 @@
                   <a:srgbClr val="1B3B6F"/>
                 </a:solidFill>
                 <a:latin typeface="Amiri" pitchFamily="2" charset="-78"/>
+                <a:ea typeface="Amiri" pitchFamily="2" charset="-78"/>
                 <a:cs typeface="Amiri" pitchFamily="2" charset="-78"/>
               </a:rPr>
               <a:t>مُرْتَفِعٌ · مُنْخَفِضٌ</a:t>
@@ -38993,6 +39246,7 @@
                   <a:srgbClr val="1B3B6F"/>
                 </a:solidFill>
                 <a:latin typeface="Amiri" pitchFamily="2" charset="-78"/>
+                <a:ea typeface="Amiri" pitchFamily="2" charset="-78"/>
                 <a:cs typeface="Amiri" pitchFamily="2" charset="-78"/>
               </a:rPr>
               <a:t>رَوَاتِبُ</a:t>
@@ -39258,6 +39512,7 @@
                   <a:srgbClr val="1B3B6F"/>
                 </a:solidFill>
                 <a:latin typeface="Amiri" pitchFamily="2" charset="-78"/>
+                <a:ea typeface="Amiri" pitchFamily="2" charset="-78"/>
                 <a:cs typeface="Amiri" pitchFamily="2" charset="-78"/>
               </a:rPr>
               <a:t>مِيزَةٌ · عَيْبٌ</a:t>
@@ -39415,6 +39670,7 @@
                   <a:srgbClr val="1B3B6F"/>
                 </a:solidFill>
                 <a:latin typeface="Amiri" pitchFamily="2" charset="-78"/>
+                <a:ea typeface="Amiri" pitchFamily="2" charset="-78"/>
                 <a:cs typeface="Amiri" pitchFamily="2" charset="-78"/>
               </a:rPr>
               <a:t>مَزَايَا · عُيُوبٌ</a:t>
@@ -39680,6 +39936,7 @@
                   <a:srgbClr val="1B3B6F"/>
                 </a:solidFill>
                 <a:latin typeface="Amiri" pitchFamily="2" charset="-78"/>
+                <a:ea typeface="Amiri" pitchFamily="2" charset="-78"/>
                 <a:cs typeface="Amiri" pitchFamily="2" charset="-78"/>
               </a:rPr>
               <a:t>مُتْعِبٌ · مُرِيحٌ</a:t>
@@ -39837,6 +40094,7 @@
                   <a:srgbClr val="1B3B6F"/>
                 </a:solidFill>
                 <a:latin typeface="Amiri" pitchFamily="2" charset="-78"/>
+                <a:ea typeface="Amiri" pitchFamily="2" charset="-78"/>
                 <a:cs typeface="Amiri" pitchFamily="2" charset="-78"/>
               </a:rPr>
               <a:t>خَطِيرٌ · خَطِيرَةٌ</a:t>
@@ -39940,6 +40198,7 @@
                   <a:srgbClr val="1B3B6F"/>
                 </a:solidFill>
                 <a:latin typeface="Amiri" pitchFamily="2" charset="-78"/>
+                <a:ea typeface="Amiri" pitchFamily="2" charset="-78"/>
                 <a:cs typeface="Amiri" pitchFamily="2" charset="-78"/>
               </a:rPr>
               <a:t>مُتْعِبَةٌ · مُرِيحَةٌ</a:t>
@@ -40073,6 +40332,7 @@
                   <a:srgbClr val="D4AF37"/>
                 </a:solidFill>
                 <a:latin typeface="Amiri" pitchFamily="2" charset="-78"/>
+                <a:ea typeface="Amiri" pitchFamily="2" charset="-78"/>
                 <a:cs typeface="Amiri" pitchFamily="2" charset="-78"/>
               </a:rPr>
               <a:t>م</a:t>
@@ -40393,6 +40653,7 @@
                   <a:srgbClr val="8A6D1E"/>
                 </a:solidFill>
                 <a:latin typeface="Amiri" pitchFamily="2" charset="-78"/>
+                <a:ea typeface="Amiri" pitchFamily="2" charset="-78"/>
                 <a:cs typeface="Amiri" pitchFamily="2" charset="-78"/>
               </a:rPr>
               <a:t>فِي الغُرَفِ</a:t>
@@ -41569,6 +41830,7 @@
                   <a:srgbClr val="1B3B6F"/>
                 </a:solidFill>
                 <a:latin typeface="Amiri" pitchFamily="2" charset="-78"/>
+                <a:ea typeface="Amiri" pitchFamily="2" charset="-78"/>
                 <a:cs typeface="Amiri" pitchFamily="2" charset="-78"/>
               </a:rPr>
               <a:t>دَوْرُكَ!</a:t>
@@ -41645,6 +41907,7 @@
                   <a:srgbClr val="1B3B6F"/>
                 </a:solidFill>
                 <a:latin typeface="Amiri" pitchFamily="2" charset="-78"/>
+                <a:ea typeface="Amiri" pitchFamily="2" charset="-78"/>
                 <a:cs typeface="Amiri" pitchFamily="2" charset="-78"/>
               </a:rPr>
               <a:t>أَحْسَنْتَ! / أَحْسَنْتِ!</a:t>
@@ -41721,6 +41984,7 @@
                   <a:srgbClr val="1B3B6F"/>
                 </a:solidFill>
                 <a:latin typeface="Amiri" pitchFamily="2" charset="-78"/>
+                <a:ea typeface="Amiri" pitchFamily="2" charset="-78"/>
                 <a:cs typeface="Amiri" pitchFamily="2" charset="-78"/>
               </a:rPr>
               <a:t>تَكَلَّمْ أَكْثَرَ، مِنْ فَضْلِكَ</a:t>
@@ -41797,6 +42061,7 @@
                   <a:srgbClr val="1B3B6F"/>
                 </a:solidFill>
                 <a:latin typeface="Amiri" pitchFamily="2" charset="-78"/>
+                <a:ea typeface="Amiri" pitchFamily="2" charset="-78"/>
                 <a:cs typeface="Amiri" pitchFamily="2" charset="-78"/>
               </a:rPr>
               <a:t>لِمَاذَا؟</a:t>
@@ -41968,6 +42233,7 @@
                   <a:srgbClr val="D4AF37"/>
                 </a:solidFill>
                 <a:latin typeface="Amiri" pitchFamily="2" charset="-78"/>
+                <a:ea typeface="Amiri" pitchFamily="2" charset="-78"/>
                 <a:cs typeface="Amiri" pitchFamily="2" charset="-78"/>
               </a:rPr>
               <a:t>م</a:t>
@@ -42288,6 +42554,7 @@
                   <a:srgbClr val="8A6D1E"/>
                 </a:solidFill>
                 <a:latin typeface="Amiri" pitchFamily="2" charset="-78"/>
+                <a:ea typeface="Amiri" pitchFamily="2" charset="-78"/>
                 <a:cs typeface="Amiri" pitchFamily="2" charset="-78"/>
               </a:rPr>
               <a:t>مَاذَا يَعْمَلُ وَالِدَاكَ؟</a:t>
@@ -42568,6 +42835,7 @@
                   <a:srgbClr val="1B3B6F"/>
                 </a:solidFill>
                 <a:latin typeface="Amiri" pitchFamily="2" charset="-78"/>
+                <a:ea typeface="Amiri" pitchFamily="2" charset="-78"/>
                 <a:cs typeface="Amiri" pitchFamily="2" charset="-78"/>
               </a:rPr>
               <a:t>أَبِي …</a:t>
@@ -42644,6 +42912,7 @@
                   <a:srgbClr val="1B3B6F"/>
                 </a:solidFill>
                 <a:latin typeface="Amiri" pitchFamily="2" charset="-78"/>
+                <a:ea typeface="Amiri" pitchFamily="2" charset="-78"/>
                 <a:cs typeface="Amiri" pitchFamily="2" charset="-78"/>
               </a:rPr>
               <a:t>مَاذَا يَعْمَلُ أَبُوكَ؟</a:t>
@@ -42812,6 +43081,7 @@
                   <a:srgbClr val="1B3B6F"/>
                 </a:solidFill>
                 <a:latin typeface="Amiri" pitchFamily="2" charset="-78"/>
+                <a:ea typeface="Amiri" pitchFamily="2" charset="-78"/>
                 <a:cs typeface="Amiri" pitchFamily="2" charset="-78"/>
               </a:rPr>
               <a:t>يَعْمَلُ فِي …</a:t>
@@ -42888,6 +43158,7 @@
                   <a:srgbClr val="1B3B6F"/>
                 </a:solidFill>
                 <a:latin typeface="Amiri" pitchFamily="2" charset="-78"/>
+                <a:ea typeface="Amiri" pitchFamily="2" charset="-78"/>
                 <a:cs typeface="Amiri" pitchFamily="2" charset="-78"/>
               </a:rPr>
               <a:t>أَيْنَ يَعْمَلُ؟</a:t>
@@ -43056,6 +43327,7 @@
                   <a:srgbClr val="1B3B6F"/>
                 </a:solidFill>
                 <a:latin typeface="Amiri" pitchFamily="2" charset="-78"/>
+                <a:ea typeface="Amiri" pitchFamily="2" charset="-78"/>
                 <a:cs typeface="Amiri" pitchFamily="2" charset="-78"/>
               </a:rPr>
               <a:t>أُمِّي …</a:t>
@@ -43132,6 +43404,7 @@
                   <a:srgbClr val="1B3B6F"/>
                 </a:solidFill>
                 <a:latin typeface="Amiri" pitchFamily="2" charset="-78"/>
+                <a:ea typeface="Amiri" pitchFamily="2" charset="-78"/>
                 <a:cs typeface="Amiri" pitchFamily="2" charset="-78"/>
               </a:rPr>
               <a:t>وَأُمُّكَ؟</a:t>
@@ -43300,6 +43573,7 @@
                   <a:srgbClr val="1B3B6F"/>
                 </a:solidFill>
                 <a:latin typeface="Amiri" pitchFamily="2" charset="-78"/>
+                <a:ea typeface="Amiri" pitchFamily="2" charset="-78"/>
                 <a:cs typeface="Amiri" pitchFamily="2" charset="-78"/>
               </a:rPr>
               <a:t>مَاذَا …؟</a:t>
@@ -43376,6 +43650,7 @@
                   <a:srgbClr val="1B3B6F"/>
                 </a:solidFill>
                 <a:latin typeface="Amiri" pitchFamily="2" charset="-78"/>
+                <a:ea typeface="Amiri" pitchFamily="2" charset="-78"/>
                 <a:cs typeface="Amiri" pitchFamily="2" charset="-78"/>
               </a:rPr>
               <a:t>أُمِّي مُعَلِّمَةٌ.</a:t>
@@ -43544,6 +43819,7 @@
                   <a:srgbClr val="1B3B6F"/>
                 </a:solidFill>
                 <a:latin typeface="Amiri" pitchFamily="2" charset="-78"/>
+                <a:ea typeface="Amiri" pitchFamily="2" charset="-78"/>
                 <a:cs typeface="Amiri" pitchFamily="2" charset="-78"/>
               </a:rPr>
               <a:t>أُرِيدُ أَنْ أَكُونَ …</a:t>
@@ -43620,6 +43896,7 @@
                   <a:srgbClr val="1B3B6F"/>
                 </a:solidFill>
                 <a:latin typeface="Amiri" pitchFamily="2" charset="-78"/>
+                <a:ea typeface="Amiri" pitchFamily="2" charset="-78"/>
                 <a:cs typeface="Amiri" pitchFamily="2" charset="-78"/>
               </a:rPr>
               <a:t>مَاذَا تُرِيدُ أَنْ تَعْمَلَ فِي المُسْتَقْبَلِ؟</a:t>
@@ -43894,6 +44171,7 @@
                   <a:srgbClr val="D4AF37"/>
                 </a:solidFill>
                 <a:latin typeface="Amiri" pitchFamily="2" charset="-78"/>
+                <a:ea typeface="Amiri" pitchFamily="2" charset="-78"/>
                 <a:cs typeface="Amiri" pitchFamily="2" charset="-78"/>
               </a:rPr>
               <a:t>م</a:t>
@@ -44214,6 +44492,7 @@
                   <a:srgbClr val="8A6D1E"/>
                 </a:solidFill>
                 <a:latin typeface="Amiri" pitchFamily="2" charset="-78"/>
+                <a:ea typeface="Amiri" pitchFamily="2" charset="-78"/>
                 <a:cs typeface="Amiri" pitchFamily="2" charset="-78"/>
               </a:rPr>
               <a:t>خَمِّنِ المِهْنَةَ</a:t>
@@ -44494,6 +44773,7 @@
                   <a:srgbClr val="1B3B6F"/>
                 </a:solidFill>
                 <a:latin typeface="Amiri" pitchFamily="2" charset="-78"/>
+                <a:ea typeface="Amiri" pitchFamily="2" charset="-78"/>
                 <a:cs typeface="Amiri" pitchFamily="2" charset="-78"/>
               </a:rPr>
               <a:t>يَعْمَلُ فِي …</a:t>
@@ -44570,6 +44850,7 @@
                   <a:srgbClr val="1B3B6F"/>
                 </a:solidFill>
                 <a:latin typeface="Amiri" pitchFamily="2" charset="-78"/>
+                <a:ea typeface="Amiri" pitchFamily="2" charset="-78"/>
                 <a:cs typeface="Amiri" pitchFamily="2" charset="-78"/>
               </a:rPr>
               <a:t>أَيْنَ يَعْمَلُ هٰذَا الشَّخْصُ؟</a:t>
@@ -44738,6 +45019,7 @@
                   <a:srgbClr val="1B3B6F"/>
                 </a:solidFill>
                 <a:latin typeface="Amiri" pitchFamily="2" charset="-78"/>
+                <a:ea typeface="Amiri" pitchFamily="2" charset="-78"/>
                 <a:cs typeface="Amiri" pitchFamily="2" charset="-78"/>
               </a:rPr>
               <a:t>يُحَضِّرُ … / يُسَاعِدُ …</a:t>
@@ -44814,6 +45096,7 @@
                   <a:srgbClr val="1B3B6F"/>
                 </a:solidFill>
                 <a:latin typeface="Amiri" pitchFamily="2" charset="-78"/>
+                <a:ea typeface="Amiri" pitchFamily="2" charset="-78"/>
                 <a:cs typeface="Amiri" pitchFamily="2" charset="-78"/>
               </a:rPr>
               <a:t>وَمَاذَا يَفْعَلُ؟</a:t>
@@ -44982,6 +45265,7 @@
                   <a:srgbClr val="1B3B6F"/>
                 </a:solidFill>
                 <a:latin typeface="Amiri" pitchFamily="2" charset="-78"/>
+                <a:ea typeface="Amiri" pitchFamily="2" charset="-78"/>
                 <a:cs typeface="Amiri" pitchFamily="2" charset="-78"/>
               </a:rPr>
               <a:t>نَعَمْ! وَالآنَ: هِيَ تَعْمَلُ فِي …</a:t>
@@ -45058,6 +45342,7 @@
                   <a:srgbClr val="1B3B6F"/>
                 </a:solidFill>
                 <a:latin typeface="Amiri" pitchFamily="2" charset="-78"/>
+                <a:ea typeface="Amiri" pitchFamily="2" charset="-78"/>
                 <a:cs typeface="Amiri" pitchFamily="2" charset="-78"/>
               </a:rPr>
               <a:t>هَلْ هُوَ طَبَّاخٌ؟</a:t>
@@ -45161,6 +45446,7 @@
                   <a:srgbClr val="1B3B6F"/>
                 </a:solidFill>
                 <a:latin typeface="Amiri" pitchFamily="2" charset="-78"/>
+                <a:ea typeface="Amiri" pitchFamily="2" charset="-78"/>
                 <a:cs typeface="Amiri" pitchFamily="2" charset="-78"/>
               </a:rPr>
               <a:t>صَحِيحٌ! دَوْرُكَ: أَيْنَ …؟</a:t>
@@ -45237,6 +45523,7 @@
                   <a:srgbClr val="1B3B6F"/>
                 </a:solidFill>
                 <a:latin typeface="Amiri" pitchFamily="2" charset="-78"/>
+                <a:ea typeface="Amiri" pitchFamily="2" charset="-78"/>
                 <a:cs typeface="Amiri" pitchFamily="2" charset="-78"/>
               </a:rPr>
               <a:t>مُحَامِيَةٌ؟</a:t>
@@ -45340,6 +45627,7 @@
                   <a:srgbClr val="1B3B6F"/>
                 </a:solidFill>
                 <a:latin typeface="Amiri" pitchFamily="2" charset="-78"/>
+                <a:ea typeface="Amiri" pitchFamily="2" charset="-78"/>
                 <a:cs typeface="Amiri" pitchFamily="2" charset="-78"/>
               </a:rPr>
               <a:t>أَصْعَبُ مِهْنَةٍ … لِأَنَّ …</a:t>
@@ -45416,6 +45704,7 @@
                   <a:srgbClr val="1B3B6F"/>
                 </a:solidFill>
                 <a:latin typeface="Amiri" pitchFamily="2" charset="-78"/>
+                <a:ea typeface="Amiri" pitchFamily="2" charset="-78"/>
                 <a:cs typeface="Amiri" pitchFamily="2" charset="-78"/>
               </a:rPr>
               <a:t>أَيُّ مِهْنَةٍ أَصْعَبُ فِي رَأْيِكَ؟</a:t>
@@ -45590,13 +45879,9 @@
     <a:fontScheme name="Office">
       <a:majorFont>
         <a:latin typeface="Calibri Light" panose="020F0302020204030204"/>
-        <a:ea typeface=""/>
-        <a:cs typeface=""/>
-        <a:font script="Jpan" typeface="游ゴシック Light"/>
-        <a:font script="Hang" typeface="맑은 고딕"/>
-        <a:font script="Hans" typeface="等线 Light"/>
-        <a:font script="Hant" typeface="新細明體"/>
-        <a:font script="Arab" typeface="Times New Roman"/>
+        <a:ea typeface="Amiri" pitchFamily="2" charset="-78"/>
+        <a:cs typeface="Amiri" pitchFamily="2" charset="-78"/>
+        <a:font script="Arab" typeface="Amiri"/>
         <a:font script="Hebr" typeface="Times New Roman"/>
         <a:font script="Thai" typeface="Angsana New"/>
         <a:font script="Ethi" typeface="Nyala"/>
@@ -45642,13 +45927,9 @@
       </a:majorFont>
       <a:minorFont>
         <a:latin typeface="Calibri" panose="020F0502020204030204"/>
-        <a:ea typeface=""/>
-        <a:cs typeface=""/>
-        <a:font script="Jpan" typeface="游ゴシック"/>
-        <a:font script="Hang" typeface="맑은 고딕"/>
-        <a:font script="Hans" typeface="等线"/>
-        <a:font script="Hant" typeface="新細明體"/>
-        <a:font script="Arab" typeface="Arial"/>
+        <a:ea typeface="Amiri" pitchFamily="2" charset="-78"/>
+        <a:cs typeface="Amiri" pitchFamily="2" charset="-78"/>
+        <a:font script="Arab" typeface="Amiri"/>
         <a:font script="Hebr" typeface="Arial"/>
         <a:font script="Thai" typeface="Cordia New"/>
         <a:font script="Ethi" typeface="Nyala"/>
